--- a/docs/pptx/entire/ritu-entire-linsubhr-ratio-grade2.pptx
+++ b/docs/pptx/entire/ritu-entire-linsubhr-ratio-grade2.pptx
@@ -2959,612 +2959,612 @@
           </p:nvSpPr>
           <p:spPr>
             <a:xfrm>
-              <a:off x="1172049" y="2579011"/>
-              <a:ext cx="7090630" cy="2768519"/>
+              <a:off x="1172049" y="2591839"/>
+              <a:ext cx="7090630" cy="2754715"/>
             </a:xfrm>
             <a:custGeom>
               <a:avLst/>
               <a:pathLst>
-                <a:path w="7090630" h="2768519">
+                <a:path w="7090630" h="2754715">
                   <a:moveTo>
                     <a:pt x="0" y="0"/>
                   </a:moveTo>
                   <a:lnTo>
-                    <a:pt x="71622" y="78760"/>
-                  </a:lnTo>
-                  <a:lnTo>
-                    <a:pt x="143245" y="155437"/>
-                  </a:lnTo>
-                  <a:lnTo>
-                    <a:pt x="214867" y="230087"/>
-                  </a:lnTo>
-                  <a:lnTo>
-                    <a:pt x="286490" y="302762"/>
-                  </a:lnTo>
-                  <a:lnTo>
-                    <a:pt x="358112" y="373516"/>
-                  </a:lnTo>
-                  <a:lnTo>
-                    <a:pt x="429735" y="442398"/>
-                  </a:lnTo>
-                  <a:lnTo>
-                    <a:pt x="501357" y="509459"/>
-                  </a:lnTo>
-                  <a:lnTo>
-                    <a:pt x="572980" y="574747"/>
-                  </a:lnTo>
-                  <a:lnTo>
-                    <a:pt x="644602" y="638308"/>
-                  </a:lnTo>
-                  <a:lnTo>
-                    <a:pt x="716225" y="700188"/>
-                  </a:lnTo>
-                  <a:lnTo>
-                    <a:pt x="787847" y="760431"/>
-                  </a:lnTo>
-                  <a:lnTo>
-                    <a:pt x="859470" y="819082"/>
-                  </a:lnTo>
-                  <a:lnTo>
-                    <a:pt x="931092" y="876181"/>
-                  </a:lnTo>
-                  <a:lnTo>
-                    <a:pt x="1002715" y="931771"/>
-                  </a:lnTo>
-                  <a:lnTo>
-                    <a:pt x="1074337" y="985890"/>
-                  </a:lnTo>
-                  <a:lnTo>
-                    <a:pt x="1145960" y="1038578"/>
-                  </a:lnTo>
-                  <a:lnTo>
-                    <a:pt x="1217582" y="1089873"/>
-                  </a:lnTo>
-                  <a:lnTo>
-                    <a:pt x="1289205" y="1139811"/>
-                  </a:lnTo>
-                  <a:lnTo>
-                    <a:pt x="1360827" y="1188429"/>
-                  </a:lnTo>
-                  <a:lnTo>
-                    <a:pt x="1432450" y="1235761"/>
-                  </a:lnTo>
-                  <a:lnTo>
-                    <a:pt x="1504073" y="1281841"/>
-                  </a:lnTo>
-                  <a:lnTo>
-                    <a:pt x="1575695" y="1326703"/>
-                  </a:lnTo>
-                  <a:lnTo>
-                    <a:pt x="1647318" y="1370378"/>
-                  </a:lnTo>
-                  <a:lnTo>
-                    <a:pt x="1718940" y="1412898"/>
-                  </a:lnTo>
-                  <a:lnTo>
-                    <a:pt x="1790563" y="1454294"/>
-                  </a:lnTo>
-                  <a:lnTo>
-                    <a:pt x="1862185" y="1494595"/>
-                  </a:lnTo>
-                  <a:lnTo>
-                    <a:pt x="1933808" y="1533830"/>
-                  </a:lnTo>
-                  <a:lnTo>
-                    <a:pt x="2005430" y="1572028"/>
-                  </a:lnTo>
-                  <a:lnTo>
-                    <a:pt x="2077053" y="1609216"/>
-                  </a:lnTo>
-                  <a:lnTo>
-                    <a:pt x="2148675" y="1645420"/>
-                  </a:lnTo>
-                  <a:lnTo>
-                    <a:pt x="2220298" y="1680666"/>
-                  </a:lnTo>
-                  <a:lnTo>
-                    <a:pt x="2291920" y="1714981"/>
-                  </a:lnTo>
-                  <a:lnTo>
-                    <a:pt x="2363543" y="1748388"/>
-                  </a:lnTo>
-                  <a:lnTo>
-                    <a:pt x="2435165" y="1780912"/>
-                  </a:lnTo>
-                  <a:lnTo>
-                    <a:pt x="2506788" y="1812575"/>
-                  </a:lnTo>
-                  <a:lnTo>
-                    <a:pt x="2578410" y="1843402"/>
-                  </a:lnTo>
-                  <a:lnTo>
-                    <a:pt x="2650033" y="1873413"/>
-                  </a:lnTo>
-                  <a:lnTo>
-                    <a:pt x="2721655" y="1902630"/>
-                  </a:lnTo>
-                  <a:lnTo>
-                    <a:pt x="2793278" y="1931075"/>
-                  </a:lnTo>
-                  <a:lnTo>
-                    <a:pt x="2864901" y="1958767"/>
-                  </a:lnTo>
-                  <a:lnTo>
-                    <a:pt x="2936523" y="1985727"/>
-                  </a:lnTo>
-                  <a:lnTo>
-                    <a:pt x="3008146" y="2011975"/>
-                  </a:lnTo>
-                  <a:lnTo>
-                    <a:pt x="3079768" y="2037528"/>
-                  </a:lnTo>
-                  <a:lnTo>
-                    <a:pt x="3151391" y="2062405"/>
-                  </a:lnTo>
-                  <a:lnTo>
-                    <a:pt x="3223013" y="2086624"/>
-                  </a:lnTo>
-                  <a:lnTo>
-                    <a:pt x="3294636" y="2110203"/>
-                  </a:lnTo>
-                  <a:lnTo>
-                    <a:pt x="3366258" y="2133159"/>
-                  </a:lnTo>
-                  <a:lnTo>
-                    <a:pt x="3437881" y="2152770"/>
-                  </a:lnTo>
-                  <a:lnTo>
-                    <a:pt x="3509503" y="2165774"/>
-                  </a:lnTo>
-                  <a:lnTo>
-                    <a:pt x="3581126" y="2178572"/>
-                  </a:lnTo>
-                  <a:lnTo>
-                    <a:pt x="3652748" y="2191170"/>
-                  </a:lnTo>
-                  <a:lnTo>
-                    <a:pt x="3724371" y="2203568"/>
-                  </a:lnTo>
-                  <a:lnTo>
-                    <a:pt x="3795993" y="2215772"/>
-                  </a:lnTo>
-                  <a:lnTo>
-                    <a:pt x="3867616" y="2227783"/>
-                  </a:lnTo>
-                  <a:lnTo>
-                    <a:pt x="3939238" y="2239605"/>
-                  </a:lnTo>
-                  <a:lnTo>
-                    <a:pt x="4010861" y="2251240"/>
-                  </a:lnTo>
-                  <a:lnTo>
-                    <a:pt x="4082483" y="2262693"/>
-                  </a:lnTo>
-                  <a:lnTo>
-                    <a:pt x="4154106" y="2273965"/>
-                  </a:lnTo>
-                  <a:lnTo>
-                    <a:pt x="4225729" y="2285059"/>
-                  </a:lnTo>
-                  <a:lnTo>
-                    <a:pt x="4297351" y="2295979"/>
-                  </a:lnTo>
-                  <a:lnTo>
-                    <a:pt x="4368974" y="2306727"/>
-                  </a:lnTo>
-                  <a:lnTo>
-                    <a:pt x="4440596" y="2317305"/>
-                  </a:lnTo>
-                  <a:lnTo>
-                    <a:pt x="4512219" y="2327717"/>
-                  </a:lnTo>
-                  <a:lnTo>
-                    <a:pt x="4583841" y="2337964"/>
-                  </a:lnTo>
-                  <a:lnTo>
-                    <a:pt x="4655464" y="2348051"/>
-                  </a:lnTo>
-                  <a:lnTo>
-                    <a:pt x="4727086" y="2357978"/>
-                  </a:lnTo>
-                  <a:lnTo>
-                    <a:pt x="4798709" y="2367749"/>
-                  </a:lnTo>
-                  <a:lnTo>
-                    <a:pt x="4870331" y="2377366"/>
-                  </a:lnTo>
-                  <a:lnTo>
-                    <a:pt x="4941954" y="2386832"/>
-                  </a:lnTo>
-                  <a:lnTo>
-                    <a:pt x="5013576" y="2396148"/>
-                  </a:lnTo>
-                  <a:lnTo>
-                    <a:pt x="5085199" y="2405318"/>
-                  </a:lnTo>
-                  <a:lnTo>
-                    <a:pt x="5156821" y="2414343"/>
-                  </a:lnTo>
-                  <a:lnTo>
-                    <a:pt x="5228444" y="2423226"/>
-                  </a:lnTo>
-                  <a:lnTo>
-                    <a:pt x="5300066" y="2431969"/>
-                  </a:lnTo>
-                  <a:lnTo>
-                    <a:pt x="5371689" y="2440575"/>
-                  </a:lnTo>
-                  <a:lnTo>
-                    <a:pt x="5443311" y="2449044"/>
-                  </a:lnTo>
-                  <a:lnTo>
-                    <a:pt x="5514934" y="2457381"/>
-                  </a:lnTo>
-                  <a:lnTo>
-                    <a:pt x="5586557" y="2465586"/>
-                  </a:lnTo>
-                  <a:lnTo>
-                    <a:pt x="5658179" y="2473662"/>
-                  </a:lnTo>
-                  <a:lnTo>
-                    <a:pt x="5729802" y="2481610"/>
-                  </a:lnTo>
-                  <a:lnTo>
-                    <a:pt x="5801424" y="2489434"/>
-                  </a:lnTo>
-                  <a:lnTo>
-                    <a:pt x="5873047" y="2497134"/>
-                  </a:lnTo>
-                  <a:lnTo>
-                    <a:pt x="5944669" y="2504713"/>
-                  </a:lnTo>
-                  <a:lnTo>
-                    <a:pt x="6016292" y="2512172"/>
-                  </a:lnTo>
-                  <a:lnTo>
-                    <a:pt x="6087914" y="2519514"/>
-                  </a:lnTo>
-                  <a:lnTo>
-                    <a:pt x="6159537" y="2526740"/>
-                  </a:lnTo>
-                  <a:lnTo>
-                    <a:pt x="6231159" y="2533853"/>
-                  </a:lnTo>
-                  <a:lnTo>
-                    <a:pt x="6302782" y="2540853"/>
-                  </a:lnTo>
-                  <a:lnTo>
-                    <a:pt x="6374404" y="2547743"/>
-                  </a:lnTo>
-                  <a:lnTo>
-                    <a:pt x="6446027" y="2554525"/>
-                  </a:lnTo>
-                  <a:lnTo>
-                    <a:pt x="6517649" y="2561200"/>
-                  </a:lnTo>
-                  <a:lnTo>
-                    <a:pt x="6589272" y="2567769"/>
-                  </a:lnTo>
-                  <a:lnTo>
-                    <a:pt x="6660894" y="2574235"/>
-                  </a:lnTo>
-                  <a:lnTo>
-                    <a:pt x="6732517" y="2580600"/>
-                  </a:lnTo>
-                  <a:lnTo>
-                    <a:pt x="6804139" y="2586864"/>
-                  </a:lnTo>
-                  <a:lnTo>
-                    <a:pt x="6875762" y="2593029"/>
-                  </a:lnTo>
-                  <a:lnTo>
-                    <a:pt x="6947385" y="2599097"/>
-                  </a:lnTo>
-                  <a:lnTo>
-                    <a:pt x="7019007" y="2605070"/>
-                  </a:lnTo>
-                  <a:lnTo>
-                    <a:pt x="7090630" y="2610948"/>
-                  </a:lnTo>
-                  <a:lnTo>
-                    <a:pt x="7090630" y="2768519"/>
-                  </a:lnTo>
-                  <a:lnTo>
-                    <a:pt x="7019007" y="2762823"/>
-                  </a:lnTo>
-                  <a:lnTo>
-                    <a:pt x="6947385" y="2756971"/>
-                  </a:lnTo>
-                  <a:lnTo>
-                    <a:pt x="6875762" y="2750961"/>
-                  </a:lnTo>
-                  <a:lnTo>
-                    <a:pt x="6804139" y="2744787"/>
-                  </a:lnTo>
-                  <a:lnTo>
-                    <a:pt x="6732517" y="2738446"/>
-                  </a:lnTo>
-                  <a:lnTo>
-                    <a:pt x="6660894" y="2731932"/>
-                  </a:lnTo>
-                  <a:lnTo>
-                    <a:pt x="6589272" y="2725242"/>
-                  </a:lnTo>
-                  <a:lnTo>
-                    <a:pt x="6517649" y="2718369"/>
-                  </a:lnTo>
-                  <a:lnTo>
-                    <a:pt x="6446027" y="2711310"/>
-                  </a:lnTo>
-                  <a:lnTo>
-                    <a:pt x="6374404" y="2704060"/>
-                  </a:lnTo>
-                  <a:lnTo>
-                    <a:pt x="6302782" y="2696612"/>
-                  </a:lnTo>
-                  <a:lnTo>
-                    <a:pt x="6231159" y="2688962"/>
-                  </a:lnTo>
-                  <a:lnTo>
-                    <a:pt x="6159537" y="2681104"/>
-                  </a:lnTo>
-                  <a:lnTo>
-                    <a:pt x="6087914" y="2673033"/>
-                  </a:lnTo>
-                  <a:lnTo>
-                    <a:pt x="6016292" y="2664742"/>
-                  </a:lnTo>
-                  <a:lnTo>
-                    <a:pt x="5944669" y="2656227"/>
-                  </a:lnTo>
-                  <a:lnTo>
-                    <a:pt x="5873047" y="2647480"/>
-                  </a:lnTo>
-                  <a:lnTo>
-                    <a:pt x="5801424" y="2638495"/>
-                  </a:lnTo>
-                  <a:lnTo>
-                    <a:pt x="5729802" y="2629267"/>
-                  </a:lnTo>
-                  <a:lnTo>
-                    <a:pt x="5658179" y="2619787"/>
-                  </a:lnTo>
-                  <a:lnTo>
-                    <a:pt x="5586557" y="2610050"/>
-                  </a:lnTo>
-                  <a:lnTo>
-                    <a:pt x="5514934" y="2600049"/>
-                  </a:lnTo>
-                  <a:lnTo>
-                    <a:pt x="5443311" y="2589776"/>
-                  </a:lnTo>
-                  <a:lnTo>
-                    <a:pt x="5371689" y="2579224"/>
-                  </a:lnTo>
-                  <a:lnTo>
-                    <a:pt x="5300066" y="2568385"/>
-                  </a:lnTo>
-                  <a:lnTo>
-                    <a:pt x="5228444" y="2557252"/>
-                  </a:lnTo>
-                  <a:lnTo>
-                    <a:pt x="5156821" y="2545817"/>
-                  </a:lnTo>
-                  <a:lnTo>
-                    <a:pt x="5085199" y="2534071"/>
-                  </a:lnTo>
-                  <a:lnTo>
-                    <a:pt x="5013576" y="2522006"/>
-                  </a:lnTo>
-                  <a:lnTo>
-                    <a:pt x="4941954" y="2509613"/>
-                  </a:lnTo>
-                  <a:lnTo>
-                    <a:pt x="4870331" y="2496883"/>
-                  </a:lnTo>
-                  <a:lnTo>
-                    <a:pt x="4798709" y="2483808"/>
-                  </a:lnTo>
-                  <a:lnTo>
-                    <a:pt x="4727086" y="2470377"/>
-                  </a:lnTo>
-                  <a:lnTo>
-                    <a:pt x="4655464" y="2456582"/>
-                  </a:lnTo>
-                  <a:lnTo>
-                    <a:pt x="4583841" y="2442412"/>
-                  </a:lnTo>
-                  <a:lnTo>
-                    <a:pt x="4512219" y="2427857"/>
-                  </a:lnTo>
-                  <a:lnTo>
-                    <a:pt x="4440596" y="2412907"/>
-                  </a:lnTo>
-                  <a:lnTo>
-                    <a:pt x="4368974" y="2397550"/>
-                  </a:lnTo>
-                  <a:lnTo>
-                    <a:pt x="4297351" y="2381777"/>
-                  </a:lnTo>
-                  <a:lnTo>
-                    <a:pt x="4225729" y="2365575"/>
-                  </a:lnTo>
-                  <a:lnTo>
-                    <a:pt x="4154106" y="2348932"/>
-                  </a:lnTo>
-                  <a:lnTo>
-                    <a:pt x="4082483" y="2331838"/>
-                  </a:lnTo>
-                  <a:lnTo>
-                    <a:pt x="4010861" y="2314280"/>
-                  </a:lnTo>
-                  <a:lnTo>
-                    <a:pt x="3939238" y="2296244"/>
-                  </a:lnTo>
-                  <a:lnTo>
-                    <a:pt x="3867616" y="2277719"/>
-                  </a:lnTo>
-                  <a:lnTo>
-                    <a:pt x="3795993" y="2258690"/>
-                  </a:lnTo>
-                  <a:lnTo>
-                    <a:pt x="3724371" y="2239145"/>
-                  </a:lnTo>
-                  <a:lnTo>
-                    <a:pt x="3652748" y="2219068"/>
-                  </a:lnTo>
-                  <a:lnTo>
-                    <a:pt x="3581126" y="2198446"/>
-                  </a:lnTo>
-                  <a:lnTo>
-                    <a:pt x="3509503" y="2177264"/>
-                  </a:lnTo>
-                  <a:lnTo>
-                    <a:pt x="3437881" y="2155507"/>
-                  </a:lnTo>
-                  <a:lnTo>
-                    <a:pt x="3366258" y="2139558"/>
-                  </a:lnTo>
-                  <a:lnTo>
-                    <a:pt x="3294636" y="2126135"/>
-                  </a:lnTo>
-                  <a:lnTo>
-                    <a:pt x="3223013" y="2112497"/>
-                  </a:lnTo>
-                  <a:lnTo>
-                    <a:pt x="3151391" y="2098641"/>
-                  </a:lnTo>
-                  <a:lnTo>
-                    <a:pt x="3079768" y="2084563"/>
-                  </a:lnTo>
-                  <a:lnTo>
-                    <a:pt x="3008146" y="2070259"/>
-                  </a:lnTo>
-                  <a:lnTo>
-                    <a:pt x="2936523" y="2055727"/>
-                  </a:lnTo>
-                  <a:lnTo>
-                    <a:pt x="2864901" y="2040962"/>
-                  </a:lnTo>
-                  <a:lnTo>
-                    <a:pt x="2793278" y="2025961"/>
-                  </a:lnTo>
-                  <a:lnTo>
-                    <a:pt x="2721655" y="2010719"/>
-                  </a:lnTo>
-                  <a:lnTo>
-                    <a:pt x="2650033" y="1995234"/>
-                  </a:lnTo>
-                  <a:lnTo>
-                    <a:pt x="2578410" y="1979501"/>
-                  </a:lnTo>
-                  <a:lnTo>
-                    <a:pt x="2506788" y="1963516"/>
-                  </a:lnTo>
-                  <a:lnTo>
-                    <a:pt x="2435165" y="1947275"/>
-                  </a:lnTo>
-                  <a:lnTo>
-                    <a:pt x="2363543" y="1930774"/>
-                  </a:lnTo>
-                  <a:lnTo>
-                    <a:pt x="2291920" y="1914009"/>
-                  </a:lnTo>
-                  <a:lnTo>
-                    <a:pt x="2220298" y="1896976"/>
-                  </a:lnTo>
-                  <a:lnTo>
-                    <a:pt x="2148675" y="1879671"/>
-                  </a:lnTo>
-                  <a:lnTo>
-                    <a:pt x="2077053" y="1862088"/>
-                  </a:lnTo>
-                  <a:lnTo>
-                    <a:pt x="2005430" y="1844224"/>
-                  </a:lnTo>
-                  <a:lnTo>
-                    <a:pt x="1933808" y="1826074"/>
-                  </a:lnTo>
-                  <a:lnTo>
-                    <a:pt x="1862185" y="1807633"/>
-                  </a:lnTo>
-                  <a:lnTo>
-                    <a:pt x="1790563" y="1788897"/>
-                  </a:lnTo>
-                  <a:lnTo>
-                    <a:pt x="1718940" y="1769862"/>
-                  </a:lnTo>
-                  <a:lnTo>
-                    <a:pt x="1647318" y="1750521"/>
-                  </a:lnTo>
-                  <a:lnTo>
-                    <a:pt x="1575695" y="1730872"/>
-                  </a:lnTo>
-                  <a:lnTo>
-                    <a:pt x="1504073" y="1710907"/>
-                  </a:lnTo>
-                  <a:lnTo>
-                    <a:pt x="1432450" y="1690623"/>
-                  </a:lnTo>
-                  <a:lnTo>
-                    <a:pt x="1360827" y="1670015"/>
-                  </a:lnTo>
-                  <a:lnTo>
-                    <a:pt x="1289205" y="1649077"/>
-                  </a:lnTo>
-                  <a:lnTo>
-                    <a:pt x="1217582" y="1627803"/>
-                  </a:lnTo>
-                  <a:lnTo>
-                    <a:pt x="1145960" y="1606189"/>
-                  </a:lnTo>
-                  <a:lnTo>
-                    <a:pt x="1074337" y="1584229"/>
-                  </a:lnTo>
-                  <a:lnTo>
-                    <a:pt x="1002715" y="1561918"/>
-                  </a:lnTo>
-                  <a:lnTo>
-                    <a:pt x="931092" y="1539250"/>
-                  </a:lnTo>
-                  <a:lnTo>
-                    <a:pt x="859470" y="1516218"/>
-                  </a:lnTo>
-                  <a:lnTo>
-                    <a:pt x="787847" y="1492819"/>
-                  </a:lnTo>
-                  <a:lnTo>
-                    <a:pt x="716225" y="1469044"/>
-                  </a:lnTo>
-                  <a:lnTo>
-                    <a:pt x="644602" y="1444889"/>
-                  </a:lnTo>
-                  <a:lnTo>
-                    <a:pt x="572980" y="1420348"/>
-                  </a:lnTo>
-                  <a:lnTo>
-                    <a:pt x="501357" y="1395413"/>
-                  </a:lnTo>
-                  <a:lnTo>
-                    <a:pt x="429735" y="1370080"/>
-                  </a:lnTo>
-                  <a:lnTo>
-                    <a:pt x="358112" y="1344341"/>
-                  </a:lnTo>
-                  <a:lnTo>
-                    <a:pt x="286490" y="1318191"/>
-                  </a:lnTo>
-                  <a:lnTo>
-                    <a:pt x="214867" y="1291621"/>
-                  </a:lnTo>
-                  <a:lnTo>
-                    <a:pt x="143245" y="1264627"/>
-                  </a:lnTo>
-                  <a:lnTo>
-                    <a:pt x="71622" y="1237200"/>
-                  </a:lnTo>
-                  <a:lnTo>
-                    <a:pt x="0" y="1209334"/>
+                    <a:pt x="71622" y="78159"/>
+                  </a:lnTo>
+                  <a:lnTo>
+                    <a:pt x="143245" y="154259"/>
+                  </a:lnTo>
+                  <a:lnTo>
+                    <a:pt x="214867" y="228353"/>
+                  </a:lnTo>
+                  <a:lnTo>
+                    <a:pt x="286490" y="300494"/>
+                  </a:lnTo>
+                  <a:lnTo>
+                    <a:pt x="358112" y="370733"/>
+                  </a:lnTo>
+                  <a:lnTo>
+                    <a:pt x="429735" y="439121"/>
+                  </a:lnTo>
+                  <a:lnTo>
+                    <a:pt x="501357" y="505707"/>
+                  </a:lnTo>
+                  <a:lnTo>
+                    <a:pt x="572980" y="570538"/>
+                  </a:lnTo>
+                  <a:lnTo>
+                    <a:pt x="644602" y="633660"/>
+                  </a:lnTo>
+                  <a:lnTo>
+                    <a:pt x="716225" y="695118"/>
+                  </a:lnTo>
+                  <a:lnTo>
+                    <a:pt x="787847" y="754956"/>
+                  </a:lnTo>
+                  <a:lnTo>
+                    <a:pt x="859470" y="813218"/>
+                  </a:lnTo>
+                  <a:lnTo>
+                    <a:pt x="931092" y="869943"/>
+                  </a:lnTo>
+                  <a:lnTo>
+                    <a:pt x="1002715" y="925174"/>
+                  </a:lnTo>
+                  <a:lnTo>
+                    <a:pt x="1074337" y="978948"/>
+                  </a:lnTo>
+                  <a:lnTo>
+                    <a:pt x="1145960" y="1031306"/>
+                  </a:lnTo>
+                  <a:lnTo>
+                    <a:pt x="1217582" y="1082283"/>
+                  </a:lnTo>
+                  <a:lnTo>
+                    <a:pt x="1289205" y="1131917"/>
+                  </a:lnTo>
+                  <a:lnTo>
+                    <a:pt x="1360827" y="1180243"/>
+                  </a:lnTo>
+                  <a:lnTo>
+                    <a:pt x="1432450" y="1227295"/>
+                  </a:lnTo>
+                  <a:lnTo>
+                    <a:pt x="1504073" y="1273106"/>
+                  </a:lnTo>
+                  <a:lnTo>
+                    <a:pt x="1575695" y="1317711"/>
+                  </a:lnTo>
+                  <a:lnTo>
+                    <a:pt x="1647318" y="1361139"/>
+                  </a:lnTo>
+                  <a:lnTo>
+                    <a:pt x="1718940" y="1403423"/>
+                  </a:lnTo>
+                  <a:lnTo>
+                    <a:pt x="1790563" y="1444593"/>
+                  </a:lnTo>
+                  <a:lnTo>
+                    <a:pt x="1862185" y="1484677"/>
+                  </a:lnTo>
+                  <a:lnTo>
+                    <a:pt x="1933808" y="1523705"/>
+                  </a:lnTo>
+                  <a:lnTo>
+                    <a:pt x="2005430" y="1561704"/>
+                  </a:lnTo>
+                  <a:lnTo>
+                    <a:pt x="2077053" y="1598702"/>
+                  </a:lnTo>
+                  <a:lnTo>
+                    <a:pt x="2148675" y="1634724"/>
+                  </a:lnTo>
+                  <a:lnTo>
+                    <a:pt x="2220298" y="1669797"/>
+                  </a:lnTo>
+                  <a:lnTo>
+                    <a:pt x="2291920" y="1703946"/>
+                  </a:lnTo>
+                  <a:lnTo>
+                    <a:pt x="2363543" y="1737194"/>
+                  </a:lnTo>
+                  <a:lnTo>
+                    <a:pt x="2435165" y="1769567"/>
+                  </a:lnTo>
+                  <a:lnTo>
+                    <a:pt x="2506788" y="1801086"/>
+                  </a:lnTo>
+                  <a:lnTo>
+                    <a:pt x="2578410" y="1831774"/>
+                  </a:lnTo>
+                  <a:lnTo>
+                    <a:pt x="2650033" y="1861653"/>
+                  </a:lnTo>
+                  <a:lnTo>
+                    <a:pt x="2721655" y="1890745"/>
+                  </a:lnTo>
+                  <a:lnTo>
+                    <a:pt x="2793278" y="1919070"/>
+                  </a:lnTo>
+                  <a:lnTo>
+                    <a:pt x="2864901" y="1946649"/>
+                  </a:lnTo>
+                  <a:lnTo>
+                    <a:pt x="2936523" y="1973500"/>
+                  </a:lnTo>
+                  <a:lnTo>
+                    <a:pt x="3008146" y="1999644"/>
+                  </a:lnTo>
+                  <a:lnTo>
+                    <a:pt x="3079768" y="2025099"/>
+                  </a:lnTo>
+                  <a:lnTo>
+                    <a:pt x="3151391" y="2049883"/>
+                  </a:lnTo>
+                  <a:lnTo>
+                    <a:pt x="3223013" y="2074014"/>
+                  </a:lnTo>
+                  <a:lnTo>
+                    <a:pt x="3294636" y="2097508"/>
+                  </a:lnTo>
+                  <a:lnTo>
+                    <a:pt x="3366258" y="2120384"/>
+                  </a:lnTo>
+                  <a:lnTo>
+                    <a:pt x="3437881" y="2139921"/>
+                  </a:lnTo>
+                  <a:lnTo>
+                    <a:pt x="3509503" y="2152860"/>
+                  </a:lnTo>
+                  <a:lnTo>
+                    <a:pt x="3581126" y="2165596"/>
+                  </a:lnTo>
+                  <a:lnTo>
+                    <a:pt x="3652748" y="2178132"/>
+                  </a:lnTo>
+                  <a:lnTo>
+                    <a:pt x="3724371" y="2190471"/>
+                  </a:lnTo>
+                  <a:lnTo>
+                    <a:pt x="3795993" y="2202617"/>
+                  </a:lnTo>
+                  <a:lnTo>
+                    <a:pt x="3867616" y="2214573"/>
+                  </a:lnTo>
+                  <a:lnTo>
+                    <a:pt x="3939238" y="2226342"/>
+                  </a:lnTo>
+                  <a:lnTo>
+                    <a:pt x="4010861" y="2237926"/>
+                  </a:lnTo>
+                  <a:lnTo>
+                    <a:pt x="4082483" y="2249328"/>
+                  </a:lnTo>
+                  <a:lnTo>
+                    <a:pt x="4154106" y="2260552"/>
+                  </a:lnTo>
+                  <a:lnTo>
+                    <a:pt x="4225729" y="2271599"/>
+                  </a:lnTo>
+                  <a:lnTo>
+                    <a:pt x="4297351" y="2282474"/>
+                  </a:lnTo>
+                  <a:lnTo>
+                    <a:pt x="4368974" y="2293178"/>
+                  </a:lnTo>
+                  <a:lnTo>
+                    <a:pt x="4440596" y="2303714"/>
+                  </a:lnTo>
+                  <a:lnTo>
+                    <a:pt x="4512219" y="2314086"/>
+                  </a:lnTo>
+                  <a:lnTo>
+                    <a:pt x="4583841" y="2324294"/>
+                  </a:lnTo>
+                  <a:lnTo>
+                    <a:pt x="4655464" y="2334343"/>
+                  </a:lnTo>
+                  <a:lnTo>
+                    <a:pt x="4727086" y="2344234"/>
+                  </a:lnTo>
+                  <a:lnTo>
+                    <a:pt x="4798709" y="2353970"/>
+                  </a:lnTo>
+                  <a:lnTo>
+                    <a:pt x="4870331" y="2363554"/>
+                  </a:lnTo>
+                  <a:lnTo>
+                    <a:pt x="4941954" y="2372987"/>
+                  </a:lnTo>
+                  <a:lnTo>
+                    <a:pt x="5013576" y="2382273"/>
+                  </a:lnTo>
+                  <a:lnTo>
+                    <a:pt x="5085199" y="2391413"/>
+                  </a:lnTo>
+                  <a:lnTo>
+                    <a:pt x="5156821" y="2400409"/>
+                  </a:lnTo>
+                  <a:lnTo>
+                    <a:pt x="5228444" y="2409265"/>
+                  </a:lnTo>
+                  <a:lnTo>
+                    <a:pt x="5300066" y="2417982"/>
+                  </a:lnTo>
+                  <a:lnTo>
+                    <a:pt x="5371689" y="2426562"/>
+                  </a:lnTo>
+                  <a:lnTo>
+                    <a:pt x="5443311" y="2435008"/>
+                  </a:lnTo>
+                  <a:lnTo>
+                    <a:pt x="5514934" y="2443321"/>
+                  </a:lnTo>
+                  <a:lnTo>
+                    <a:pt x="5586557" y="2451504"/>
+                  </a:lnTo>
+                  <a:lnTo>
+                    <a:pt x="5658179" y="2459559"/>
+                  </a:lnTo>
+                  <a:lnTo>
+                    <a:pt x="5729802" y="2467488"/>
+                  </a:lnTo>
+                  <a:lnTo>
+                    <a:pt x="5801424" y="2475292"/>
+                  </a:lnTo>
+                  <a:lnTo>
+                    <a:pt x="5873047" y="2482974"/>
+                  </a:lnTo>
+                  <a:lnTo>
+                    <a:pt x="5944669" y="2490536"/>
+                  </a:lnTo>
+                  <a:lnTo>
+                    <a:pt x="6016292" y="2497979"/>
+                  </a:lnTo>
+                  <a:lnTo>
+                    <a:pt x="6087914" y="2505305"/>
+                  </a:lnTo>
+                  <a:lnTo>
+                    <a:pt x="6159537" y="2512517"/>
+                  </a:lnTo>
+                  <a:lnTo>
+                    <a:pt x="6231159" y="2519615"/>
+                  </a:lnTo>
+                  <a:lnTo>
+                    <a:pt x="6302782" y="2526602"/>
+                  </a:lnTo>
+                  <a:lnTo>
+                    <a:pt x="6374404" y="2533480"/>
+                  </a:lnTo>
+                  <a:lnTo>
+                    <a:pt x="6446027" y="2540250"/>
+                  </a:lnTo>
+                  <a:lnTo>
+                    <a:pt x="6517649" y="2546914"/>
+                  </a:lnTo>
+                  <a:lnTo>
+                    <a:pt x="6589272" y="2553473"/>
+                  </a:lnTo>
+                  <a:lnTo>
+                    <a:pt x="6660894" y="2559930"/>
+                  </a:lnTo>
+                  <a:lnTo>
+                    <a:pt x="6732517" y="2566285"/>
+                  </a:lnTo>
+                  <a:lnTo>
+                    <a:pt x="6804139" y="2572541"/>
+                  </a:lnTo>
+                  <a:lnTo>
+                    <a:pt x="6875762" y="2578699"/>
+                  </a:lnTo>
+                  <a:lnTo>
+                    <a:pt x="6947385" y="2584760"/>
+                  </a:lnTo>
+                  <a:lnTo>
+                    <a:pt x="7019007" y="2590726"/>
+                  </a:lnTo>
+                  <a:lnTo>
+                    <a:pt x="7090630" y="2596599"/>
+                  </a:lnTo>
+                  <a:lnTo>
+                    <a:pt x="7090630" y="2754715"/>
+                  </a:lnTo>
+                  <a:lnTo>
+                    <a:pt x="7019007" y="2749011"/>
+                  </a:lnTo>
+                  <a:lnTo>
+                    <a:pt x="6947385" y="2743153"/>
+                  </a:lnTo>
+                  <a:lnTo>
+                    <a:pt x="6875762" y="2737137"/>
+                  </a:lnTo>
+                  <a:lnTo>
+                    <a:pt x="6804139" y="2730957"/>
+                  </a:lnTo>
+                  <a:lnTo>
+                    <a:pt x="6732517" y="2724610"/>
+                  </a:lnTo>
+                  <a:lnTo>
+                    <a:pt x="6660894" y="2718092"/>
+                  </a:lnTo>
+                  <a:lnTo>
+                    <a:pt x="6589272" y="2711397"/>
+                  </a:lnTo>
+                  <a:lnTo>
+                    <a:pt x="6517649" y="2704520"/>
+                  </a:lnTo>
+                  <a:lnTo>
+                    <a:pt x="6446027" y="2697458"/>
+                  </a:lnTo>
+                  <a:lnTo>
+                    <a:pt x="6374404" y="2690204"/>
+                  </a:lnTo>
+                  <a:lnTo>
+                    <a:pt x="6302782" y="2682754"/>
+                  </a:lnTo>
+                  <a:lnTo>
+                    <a:pt x="6231159" y="2675103"/>
+                  </a:lnTo>
+                  <a:lnTo>
+                    <a:pt x="6159537" y="2667244"/>
+                  </a:lnTo>
+                  <a:lnTo>
+                    <a:pt x="6087914" y="2659172"/>
+                  </a:lnTo>
+                  <a:lnTo>
+                    <a:pt x="6016292" y="2650882"/>
+                  </a:lnTo>
+                  <a:lnTo>
+                    <a:pt x="5944669" y="2642368"/>
+                  </a:lnTo>
+                  <a:lnTo>
+                    <a:pt x="5873047" y="2633623"/>
+                  </a:lnTo>
+                  <a:lnTo>
+                    <a:pt x="5801424" y="2624641"/>
+                  </a:lnTo>
+                  <a:lnTo>
+                    <a:pt x="5729802" y="2615416"/>
+                  </a:lnTo>
+                  <a:lnTo>
+                    <a:pt x="5658179" y="2605942"/>
+                  </a:lnTo>
+                  <a:lnTo>
+                    <a:pt x="5586557" y="2596211"/>
+                  </a:lnTo>
+                  <a:lnTo>
+                    <a:pt x="5514934" y="2586216"/>
+                  </a:lnTo>
+                  <a:lnTo>
+                    <a:pt x="5443311" y="2575951"/>
+                  </a:lnTo>
+                  <a:lnTo>
+                    <a:pt x="5371689" y="2565408"/>
+                  </a:lnTo>
+                  <a:lnTo>
+                    <a:pt x="5300066" y="2554580"/>
+                  </a:lnTo>
+                  <a:lnTo>
+                    <a:pt x="5228444" y="2543459"/>
+                  </a:lnTo>
+                  <a:lnTo>
+                    <a:pt x="5156821" y="2532036"/>
+                  </a:lnTo>
+                  <a:lnTo>
+                    <a:pt x="5085199" y="2520305"/>
+                  </a:lnTo>
+                  <a:lnTo>
+                    <a:pt x="5013576" y="2508255"/>
+                  </a:lnTo>
+                  <a:lnTo>
+                    <a:pt x="4941954" y="2495880"/>
+                  </a:lnTo>
+                  <a:lnTo>
+                    <a:pt x="4870331" y="2483169"/>
+                  </a:lnTo>
+                  <a:lnTo>
+                    <a:pt x="4798709" y="2470115"/>
+                  </a:lnTo>
+                  <a:lnTo>
+                    <a:pt x="4727086" y="2456707"/>
+                  </a:lnTo>
+                  <a:lnTo>
+                    <a:pt x="4655464" y="2442936"/>
+                  </a:lnTo>
+                  <a:lnTo>
+                    <a:pt x="4583841" y="2428792"/>
+                  </a:lnTo>
+                  <a:lnTo>
+                    <a:pt x="4512219" y="2414266"/>
+                  </a:lnTo>
+                  <a:lnTo>
+                    <a:pt x="4440596" y="2399346"/>
+                  </a:lnTo>
+                  <a:lnTo>
+                    <a:pt x="4368974" y="2384022"/>
+                  </a:lnTo>
+                  <a:lnTo>
+                    <a:pt x="4297351" y="2368284"/>
+                  </a:lnTo>
+                  <a:lnTo>
+                    <a:pt x="4225729" y="2352119"/>
+                  </a:lnTo>
+                  <a:lnTo>
+                    <a:pt x="4154106" y="2335517"/>
+                  </a:lnTo>
+                  <a:lnTo>
+                    <a:pt x="4082483" y="2318465"/>
+                  </a:lnTo>
+                  <a:lnTo>
+                    <a:pt x="4010861" y="2300952"/>
+                  </a:lnTo>
+                  <a:lnTo>
+                    <a:pt x="3939238" y="2282965"/>
+                  </a:lnTo>
+                  <a:lnTo>
+                    <a:pt x="3867616" y="2264491"/>
+                  </a:lnTo>
+                  <a:lnTo>
+                    <a:pt x="3795993" y="2245516"/>
+                  </a:lnTo>
+                  <a:lnTo>
+                    <a:pt x="3724371" y="2226028"/>
+                  </a:lnTo>
+                  <a:lnTo>
+                    <a:pt x="3652748" y="2206013"/>
+                  </a:lnTo>
+                  <a:lnTo>
+                    <a:pt x="3581126" y="2185455"/>
+                  </a:lnTo>
+                  <a:lnTo>
+                    <a:pt x="3509503" y="2164342"/>
+                  </a:lnTo>
+                  <a:lnTo>
+                    <a:pt x="3437881" y="2142656"/>
+                  </a:lnTo>
+                  <a:lnTo>
+                    <a:pt x="3366258" y="2126777"/>
+                  </a:lnTo>
+                  <a:lnTo>
+                    <a:pt x="3294636" y="2113423"/>
+                  </a:lnTo>
+                  <a:lnTo>
+                    <a:pt x="3223013" y="2099857"/>
+                  </a:lnTo>
+                  <a:lnTo>
+                    <a:pt x="3151391" y="2086074"/>
+                  </a:lnTo>
+                  <a:lnTo>
+                    <a:pt x="3079768" y="2072072"/>
+                  </a:lnTo>
+                  <a:lnTo>
+                    <a:pt x="3008146" y="2057847"/>
+                  </a:lnTo>
+                  <a:lnTo>
+                    <a:pt x="2936523" y="2043396"/>
+                  </a:lnTo>
+                  <a:lnTo>
+                    <a:pt x="2864901" y="2028714"/>
+                  </a:lnTo>
+                  <a:lnTo>
+                    <a:pt x="2793278" y="2013799"/>
+                  </a:lnTo>
+                  <a:lnTo>
+                    <a:pt x="2721655" y="1998646"/>
+                  </a:lnTo>
+                  <a:lnTo>
+                    <a:pt x="2650033" y="1983252"/>
+                  </a:lnTo>
+                  <a:lnTo>
+                    <a:pt x="2578410" y="1967613"/>
+                  </a:lnTo>
+                  <a:lnTo>
+                    <a:pt x="2506788" y="1951725"/>
+                  </a:lnTo>
+                  <a:lnTo>
+                    <a:pt x="2435165" y="1935584"/>
+                  </a:lnTo>
+                  <a:lnTo>
+                    <a:pt x="2363543" y="1919185"/>
+                  </a:lnTo>
+                  <a:lnTo>
+                    <a:pt x="2291920" y="1902526"/>
+                  </a:lnTo>
+                  <a:lnTo>
+                    <a:pt x="2220298" y="1885601"/>
+                  </a:lnTo>
+                  <a:lnTo>
+                    <a:pt x="2148675" y="1868407"/>
+                  </a:lnTo>
+                  <a:lnTo>
+                    <a:pt x="2077053" y="1850939"/>
+                  </a:lnTo>
+                  <a:lnTo>
+                    <a:pt x="2005430" y="1833193"/>
+                  </a:lnTo>
+                  <a:lnTo>
+                    <a:pt x="1933808" y="1815165"/>
+                  </a:lnTo>
+                  <a:lnTo>
+                    <a:pt x="1862185" y="1796849"/>
+                  </a:lnTo>
+                  <a:lnTo>
+                    <a:pt x="1790563" y="1778242"/>
+                  </a:lnTo>
+                  <a:lnTo>
+                    <a:pt x="1718940" y="1759338"/>
+                  </a:lnTo>
+                  <a:lnTo>
+                    <a:pt x="1647318" y="1740133"/>
+                  </a:lnTo>
+                  <a:lnTo>
+                    <a:pt x="1575695" y="1720623"/>
+                  </a:lnTo>
+                  <a:lnTo>
+                    <a:pt x="1504073" y="1700802"/>
+                  </a:lnTo>
+                  <a:lnTo>
+                    <a:pt x="1432450" y="1680665"/>
+                  </a:lnTo>
+                  <a:lnTo>
+                    <a:pt x="1360827" y="1660208"/>
+                  </a:lnTo>
+                  <a:lnTo>
+                    <a:pt x="1289205" y="1639424"/>
+                  </a:lnTo>
+                  <a:lnTo>
+                    <a:pt x="1217582" y="1618310"/>
+                  </a:lnTo>
+                  <a:lnTo>
+                    <a:pt x="1145960" y="1596860"/>
+                  </a:lnTo>
+                  <a:lnTo>
+                    <a:pt x="1074337" y="1575068"/>
+                  </a:lnTo>
+                  <a:lnTo>
+                    <a:pt x="1002715" y="1552929"/>
+                  </a:lnTo>
+                  <a:lnTo>
+                    <a:pt x="931092" y="1530438"/>
+                  </a:lnTo>
+                  <a:lnTo>
+                    <a:pt x="859470" y="1507589"/>
+                  </a:lnTo>
+                  <a:lnTo>
+                    <a:pt x="787847" y="1484375"/>
+                  </a:lnTo>
+                  <a:lnTo>
+                    <a:pt x="716225" y="1460792"/>
+                  </a:lnTo>
+                  <a:lnTo>
+                    <a:pt x="644602" y="1436834"/>
+                  </a:lnTo>
+                  <a:lnTo>
+                    <a:pt x="572980" y="1412494"/>
+                  </a:lnTo>
+                  <a:lnTo>
+                    <a:pt x="501357" y="1387766"/>
+                  </a:lnTo>
+                  <a:lnTo>
+                    <a:pt x="429735" y="1362645"/>
+                  </a:lnTo>
+                  <a:lnTo>
+                    <a:pt x="358112" y="1337124"/>
+                  </a:lnTo>
+                  <a:lnTo>
+                    <a:pt x="286490" y="1311196"/>
+                  </a:lnTo>
+                  <a:lnTo>
+                    <a:pt x="214867" y="1284855"/>
+                  </a:lnTo>
+                  <a:lnTo>
+                    <a:pt x="143245" y="1258095"/>
+                  </a:lnTo>
+                  <a:lnTo>
+                    <a:pt x="71622" y="1230909"/>
+                  </a:lnTo>
+                  <a:lnTo>
+                    <a:pt x="0" y="1203290"/>
                   </a:lnTo>
                   <a:close/>
                 </a:path>
@@ -3590,312 +3590,312 @@
           </p:nvSpPr>
           <p:spPr>
             <a:xfrm>
-              <a:off x="1172049" y="2579011"/>
-              <a:ext cx="7090630" cy="2610948"/>
+              <a:off x="1172049" y="2591839"/>
+              <a:ext cx="7090630" cy="2596599"/>
             </a:xfrm>
             <a:custGeom>
               <a:avLst/>
               <a:pathLst>
-                <a:path w="7090630" h="2610948">
+                <a:path w="7090630" h="2596599">
                   <a:moveTo>
                     <a:pt x="0" y="0"/>
                   </a:moveTo>
                   <a:lnTo>
-                    <a:pt x="71622" y="78760"/>
-                  </a:lnTo>
-                  <a:lnTo>
-                    <a:pt x="143245" y="155437"/>
-                  </a:lnTo>
-                  <a:lnTo>
-                    <a:pt x="214867" y="230087"/>
-                  </a:lnTo>
-                  <a:lnTo>
-                    <a:pt x="286490" y="302762"/>
-                  </a:lnTo>
-                  <a:lnTo>
-                    <a:pt x="358112" y="373516"/>
-                  </a:lnTo>
-                  <a:lnTo>
-                    <a:pt x="429735" y="442398"/>
-                  </a:lnTo>
-                  <a:lnTo>
-                    <a:pt x="501357" y="509459"/>
-                  </a:lnTo>
-                  <a:lnTo>
-                    <a:pt x="572980" y="574747"/>
-                  </a:lnTo>
-                  <a:lnTo>
-                    <a:pt x="644602" y="638308"/>
-                  </a:lnTo>
-                  <a:lnTo>
-                    <a:pt x="716225" y="700188"/>
-                  </a:lnTo>
-                  <a:lnTo>
-                    <a:pt x="787847" y="760431"/>
-                  </a:lnTo>
-                  <a:lnTo>
-                    <a:pt x="859470" y="819082"/>
-                  </a:lnTo>
-                  <a:lnTo>
-                    <a:pt x="931092" y="876181"/>
-                  </a:lnTo>
-                  <a:lnTo>
-                    <a:pt x="1002715" y="931771"/>
-                  </a:lnTo>
-                  <a:lnTo>
-                    <a:pt x="1074337" y="985890"/>
-                  </a:lnTo>
-                  <a:lnTo>
-                    <a:pt x="1145960" y="1038578"/>
-                  </a:lnTo>
-                  <a:lnTo>
-                    <a:pt x="1217582" y="1089873"/>
-                  </a:lnTo>
-                  <a:lnTo>
-                    <a:pt x="1289205" y="1139811"/>
-                  </a:lnTo>
-                  <a:lnTo>
-                    <a:pt x="1360827" y="1188429"/>
-                  </a:lnTo>
-                  <a:lnTo>
-                    <a:pt x="1432450" y="1235761"/>
-                  </a:lnTo>
-                  <a:lnTo>
-                    <a:pt x="1504073" y="1281841"/>
-                  </a:lnTo>
-                  <a:lnTo>
-                    <a:pt x="1575695" y="1326703"/>
-                  </a:lnTo>
-                  <a:lnTo>
-                    <a:pt x="1647318" y="1370378"/>
-                  </a:lnTo>
-                  <a:lnTo>
-                    <a:pt x="1718940" y="1412898"/>
-                  </a:lnTo>
-                  <a:lnTo>
-                    <a:pt x="1790563" y="1454294"/>
-                  </a:lnTo>
-                  <a:lnTo>
-                    <a:pt x="1862185" y="1494595"/>
-                  </a:lnTo>
-                  <a:lnTo>
-                    <a:pt x="1933808" y="1533830"/>
-                  </a:lnTo>
-                  <a:lnTo>
-                    <a:pt x="2005430" y="1572028"/>
-                  </a:lnTo>
-                  <a:lnTo>
-                    <a:pt x="2077053" y="1609216"/>
-                  </a:lnTo>
-                  <a:lnTo>
-                    <a:pt x="2148675" y="1645420"/>
-                  </a:lnTo>
-                  <a:lnTo>
-                    <a:pt x="2220298" y="1680666"/>
-                  </a:lnTo>
-                  <a:lnTo>
-                    <a:pt x="2291920" y="1714981"/>
-                  </a:lnTo>
-                  <a:lnTo>
-                    <a:pt x="2363543" y="1748388"/>
-                  </a:lnTo>
-                  <a:lnTo>
-                    <a:pt x="2435165" y="1780912"/>
-                  </a:lnTo>
-                  <a:lnTo>
-                    <a:pt x="2506788" y="1812575"/>
-                  </a:lnTo>
-                  <a:lnTo>
-                    <a:pt x="2578410" y="1843402"/>
-                  </a:lnTo>
-                  <a:lnTo>
-                    <a:pt x="2650033" y="1873413"/>
-                  </a:lnTo>
-                  <a:lnTo>
-                    <a:pt x="2721655" y="1902630"/>
-                  </a:lnTo>
-                  <a:lnTo>
-                    <a:pt x="2793278" y="1931075"/>
-                  </a:lnTo>
-                  <a:lnTo>
-                    <a:pt x="2864901" y="1958767"/>
-                  </a:lnTo>
-                  <a:lnTo>
-                    <a:pt x="2936523" y="1985727"/>
-                  </a:lnTo>
-                  <a:lnTo>
-                    <a:pt x="3008146" y="2011975"/>
-                  </a:lnTo>
-                  <a:lnTo>
-                    <a:pt x="3079768" y="2037528"/>
-                  </a:lnTo>
-                  <a:lnTo>
-                    <a:pt x="3151391" y="2062405"/>
-                  </a:lnTo>
-                  <a:lnTo>
-                    <a:pt x="3223013" y="2086624"/>
-                  </a:lnTo>
-                  <a:lnTo>
-                    <a:pt x="3294636" y="2110203"/>
-                  </a:lnTo>
-                  <a:lnTo>
-                    <a:pt x="3366258" y="2133159"/>
-                  </a:lnTo>
-                  <a:lnTo>
-                    <a:pt x="3437881" y="2152770"/>
-                  </a:lnTo>
-                  <a:lnTo>
-                    <a:pt x="3509503" y="2165774"/>
-                  </a:lnTo>
-                  <a:lnTo>
-                    <a:pt x="3581126" y="2178572"/>
-                  </a:lnTo>
-                  <a:lnTo>
-                    <a:pt x="3652748" y="2191170"/>
-                  </a:lnTo>
-                  <a:lnTo>
-                    <a:pt x="3724371" y="2203568"/>
-                  </a:lnTo>
-                  <a:lnTo>
-                    <a:pt x="3795993" y="2215772"/>
-                  </a:lnTo>
-                  <a:lnTo>
-                    <a:pt x="3867616" y="2227783"/>
-                  </a:lnTo>
-                  <a:lnTo>
-                    <a:pt x="3939238" y="2239605"/>
-                  </a:lnTo>
-                  <a:lnTo>
-                    <a:pt x="4010861" y="2251240"/>
-                  </a:lnTo>
-                  <a:lnTo>
-                    <a:pt x="4082483" y="2262693"/>
-                  </a:lnTo>
-                  <a:lnTo>
-                    <a:pt x="4154106" y="2273965"/>
-                  </a:lnTo>
-                  <a:lnTo>
-                    <a:pt x="4225729" y="2285059"/>
-                  </a:lnTo>
-                  <a:lnTo>
-                    <a:pt x="4297351" y="2295979"/>
-                  </a:lnTo>
-                  <a:lnTo>
-                    <a:pt x="4368974" y="2306727"/>
-                  </a:lnTo>
-                  <a:lnTo>
-                    <a:pt x="4440596" y="2317305"/>
-                  </a:lnTo>
-                  <a:lnTo>
-                    <a:pt x="4512219" y="2327717"/>
-                  </a:lnTo>
-                  <a:lnTo>
-                    <a:pt x="4583841" y="2337964"/>
-                  </a:lnTo>
-                  <a:lnTo>
-                    <a:pt x="4655464" y="2348051"/>
-                  </a:lnTo>
-                  <a:lnTo>
-                    <a:pt x="4727086" y="2357978"/>
-                  </a:lnTo>
-                  <a:lnTo>
-                    <a:pt x="4798709" y="2367749"/>
-                  </a:lnTo>
-                  <a:lnTo>
-                    <a:pt x="4870331" y="2377366"/>
-                  </a:lnTo>
-                  <a:lnTo>
-                    <a:pt x="4941954" y="2386832"/>
-                  </a:lnTo>
-                  <a:lnTo>
-                    <a:pt x="5013576" y="2396148"/>
-                  </a:lnTo>
-                  <a:lnTo>
-                    <a:pt x="5085199" y="2405318"/>
-                  </a:lnTo>
-                  <a:lnTo>
-                    <a:pt x="5156821" y="2414343"/>
-                  </a:lnTo>
-                  <a:lnTo>
-                    <a:pt x="5228444" y="2423226"/>
-                  </a:lnTo>
-                  <a:lnTo>
-                    <a:pt x="5300066" y="2431969"/>
-                  </a:lnTo>
-                  <a:lnTo>
-                    <a:pt x="5371689" y="2440575"/>
-                  </a:lnTo>
-                  <a:lnTo>
-                    <a:pt x="5443311" y="2449044"/>
-                  </a:lnTo>
-                  <a:lnTo>
-                    <a:pt x="5514934" y="2457381"/>
-                  </a:lnTo>
-                  <a:lnTo>
-                    <a:pt x="5586557" y="2465586"/>
-                  </a:lnTo>
-                  <a:lnTo>
-                    <a:pt x="5658179" y="2473662"/>
-                  </a:lnTo>
-                  <a:lnTo>
-                    <a:pt x="5729802" y="2481610"/>
-                  </a:lnTo>
-                  <a:lnTo>
-                    <a:pt x="5801424" y="2489434"/>
-                  </a:lnTo>
-                  <a:lnTo>
-                    <a:pt x="5873047" y="2497134"/>
-                  </a:lnTo>
-                  <a:lnTo>
-                    <a:pt x="5944669" y="2504713"/>
-                  </a:lnTo>
-                  <a:lnTo>
-                    <a:pt x="6016292" y="2512172"/>
-                  </a:lnTo>
-                  <a:lnTo>
-                    <a:pt x="6087914" y="2519514"/>
-                  </a:lnTo>
-                  <a:lnTo>
-                    <a:pt x="6159537" y="2526740"/>
-                  </a:lnTo>
-                  <a:lnTo>
-                    <a:pt x="6231159" y="2533853"/>
-                  </a:lnTo>
-                  <a:lnTo>
-                    <a:pt x="6302782" y="2540853"/>
-                  </a:lnTo>
-                  <a:lnTo>
-                    <a:pt x="6374404" y="2547743"/>
-                  </a:lnTo>
-                  <a:lnTo>
-                    <a:pt x="6446027" y="2554525"/>
-                  </a:lnTo>
-                  <a:lnTo>
-                    <a:pt x="6517649" y="2561200"/>
-                  </a:lnTo>
-                  <a:lnTo>
-                    <a:pt x="6589272" y="2567769"/>
-                  </a:lnTo>
-                  <a:lnTo>
-                    <a:pt x="6660894" y="2574235"/>
-                  </a:lnTo>
-                  <a:lnTo>
-                    <a:pt x="6732517" y="2580600"/>
-                  </a:lnTo>
-                  <a:lnTo>
-                    <a:pt x="6804139" y="2586864"/>
-                  </a:lnTo>
-                  <a:lnTo>
-                    <a:pt x="6875762" y="2593029"/>
-                  </a:lnTo>
-                  <a:lnTo>
-                    <a:pt x="6947385" y="2599097"/>
-                  </a:lnTo>
-                  <a:lnTo>
-                    <a:pt x="7019007" y="2605070"/>
-                  </a:lnTo>
-                  <a:lnTo>
-                    <a:pt x="7090630" y="2610948"/>
+                    <a:pt x="71622" y="78159"/>
+                  </a:lnTo>
+                  <a:lnTo>
+                    <a:pt x="143245" y="154259"/>
+                  </a:lnTo>
+                  <a:lnTo>
+                    <a:pt x="214867" y="228353"/>
+                  </a:lnTo>
+                  <a:lnTo>
+                    <a:pt x="286490" y="300494"/>
+                  </a:lnTo>
+                  <a:lnTo>
+                    <a:pt x="358112" y="370733"/>
+                  </a:lnTo>
+                  <a:lnTo>
+                    <a:pt x="429735" y="439121"/>
+                  </a:lnTo>
+                  <a:lnTo>
+                    <a:pt x="501357" y="505707"/>
+                  </a:lnTo>
+                  <a:lnTo>
+                    <a:pt x="572980" y="570538"/>
+                  </a:lnTo>
+                  <a:lnTo>
+                    <a:pt x="644602" y="633660"/>
+                  </a:lnTo>
+                  <a:lnTo>
+                    <a:pt x="716225" y="695118"/>
+                  </a:lnTo>
+                  <a:lnTo>
+                    <a:pt x="787847" y="754956"/>
+                  </a:lnTo>
+                  <a:lnTo>
+                    <a:pt x="859470" y="813218"/>
+                  </a:lnTo>
+                  <a:lnTo>
+                    <a:pt x="931092" y="869943"/>
+                  </a:lnTo>
+                  <a:lnTo>
+                    <a:pt x="1002715" y="925174"/>
+                  </a:lnTo>
+                  <a:lnTo>
+                    <a:pt x="1074337" y="978948"/>
+                  </a:lnTo>
+                  <a:lnTo>
+                    <a:pt x="1145960" y="1031306"/>
+                  </a:lnTo>
+                  <a:lnTo>
+                    <a:pt x="1217582" y="1082283"/>
+                  </a:lnTo>
+                  <a:lnTo>
+                    <a:pt x="1289205" y="1131917"/>
+                  </a:lnTo>
+                  <a:lnTo>
+                    <a:pt x="1360827" y="1180243"/>
+                  </a:lnTo>
+                  <a:lnTo>
+                    <a:pt x="1432450" y="1227295"/>
+                  </a:lnTo>
+                  <a:lnTo>
+                    <a:pt x="1504073" y="1273106"/>
+                  </a:lnTo>
+                  <a:lnTo>
+                    <a:pt x="1575695" y="1317711"/>
+                  </a:lnTo>
+                  <a:lnTo>
+                    <a:pt x="1647318" y="1361139"/>
+                  </a:lnTo>
+                  <a:lnTo>
+                    <a:pt x="1718940" y="1403423"/>
+                  </a:lnTo>
+                  <a:lnTo>
+                    <a:pt x="1790563" y="1444593"/>
+                  </a:lnTo>
+                  <a:lnTo>
+                    <a:pt x="1862185" y="1484677"/>
+                  </a:lnTo>
+                  <a:lnTo>
+                    <a:pt x="1933808" y="1523705"/>
+                  </a:lnTo>
+                  <a:lnTo>
+                    <a:pt x="2005430" y="1561704"/>
+                  </a:lnTo>
+                  <a:lnTo>
+                    <a:pt x="2077053" y="1598702"/>
+                  </a:lnTo>
+                  <a:lnTo>
+                    <a:pt x="2148675" y="1634724"/>
+                  </a:lnTo>
+                  <a:lnTo>
+                    <a:pt x="2220298" y="1669797"/>
+                  </a:lnTo>
+                  <a:lnTo>
+                    <a:pt x="2291920" y="1703946"/>
+                  </a:lnTo>
+                  <a:lnTo>
+                    <a:pt x="2363543" y="1737194"/>
+                  </a:lnTo>
+                  <a:lnTo>
+                    <a:pt x="2435165" y="1769567"/>
+                  </a:lnTo>
+                  <a:lnTo>
+                    <a:pt x="2506788" y="1801086"/>
+                  </a:lnTo>
+                  <a:lnTo>
+                    <a:pt x="2578410" y="1831774"/>
+                  </a:lnTo>
+                  <a:lnTo>
+                    <a:pt x="2650033" y="1861653"/>
+                  </a:lnTo>
+                  <a:lnTo>
+                    <a:pt x="2721655" y="1890745"/>
+                  </a:lnTo>
+                  <a:lnTo>
+                    <a:pt x="2793278" y="1919070"/>
+                  </a:lnTo>
+                  <a:lnTo>
+                    <a:pt x="2864901" y="1946649"/>
+                  </a:lnTo>
+                  <a:lnTo>
+                    <a:pt x="2936523" y="1973500"/>
+                  </a:lnTo>
+                  <a:lnTo>
+                    <a:pt x="3008146" y="1999644"/>
+                  </a:lnTo>
+                  <a:lnTo>
+                    <a:pt x="3079768" y="2025099"/>
+                  </a:lnTo>
+                  <a:lnTo>
+                    <a:pt x="3151391" y="2049883"/>
+                  </a:lnTo>
+                  <a:lnTo>
+                    <a:pt x="3223013" y="2074014"/>
+                  </a:lnTo>
+                  <a:lnTo>
+                    <a:pt x="3294636" y="2097508"/>
+                  </a:lnTo>
+                  <a:lnTo>
+                    <a:pt x="3366258" y="2120384"/>
+                  </a:lnTo>
+                  <a:lnTo>
+                    <a:pt x="3437881" y="2139921"/>
+                  </a:lnTo>
+                  <a:lnTo>
+                    <a:pt x="3509503" y="2152860"/>
+                  </a:lnTo>
+                  <a:lnTo>
+                    <a:pt x="3581126" y="2165596"/>
+                  </a:lnTo>
+                  <a:lnTo>
+                    <a:pt x="3652748" y="2178132"/>
+                  </a:lnTo>
+                  <a:lnTo>
+                    <a:pt x="3724371" y="2190471"/>
+                  </a:lnTo>
+                  <a:lnTo>
+                    <a:pt x="3795993" y="2202617"/>
+                  </a:lnTo>
+                  <a:lnTo>
+                    <a:pt x="3867616" y="2214573"/>
+                  </a:lnTo>
+                  <a:lnTo>
+                    <a:pt x="3939238" y="2226342"/>
+                  </a:lnTo>
+                  <a:lnTo>
+                    <a:pt x="4010861" y="2237926"/>
+                  </a:lnTo>
+                  <a:lnTo>
+                    <a:pt x="4082483" y="2249328"/>
+                  </a:lnTo>
+                  <a:lnTo>
+                    <a:pt x="4154106" y="2260552"/>
+                  </a:lnTo>
+                  <a:lnTo>
+                    <a:pt x="4225729" y="2271599"/>
+                  </a:lnTo>
+                  <a:lnTo>
+                    <a:pt x="4297351" y="2282474"/>
+                  </a:lnTo>
+                  <a:lnTo>
+                    <a:pt x="4368974" y="2293178"/>
+                  </a:lnTo>
+                  <a:lnTo>
+                    <a:pt x="4440596" y="2303714"/>
+                  </a:lnTo>
+                  <a:lnTo>
+                    <a:pt x="4512219" y="2314086"/>
+                  </a:lnTo>
+                  <a:lnTo>
+                    <a:pt x="4583841" y="2324294"/>
+                  </a:lnTo>
+                  <a:lnTo>
+                    <a:pt x="4655464" y="2334343"/>
+                  </a:lnTo>
+                  <a:lnTo>
+                    <a:pt x="4727086" y="2344234"/>
+                  </a:lnTo>
+                  <a:lnTo>
+                    <a:pt x="4798709" y="2353970"/>
+                  </a:lnTo>
+                  <a:lnTo>
+                    <a:pt x="4870331" y="2363554"/>
+                  </a:lnTo>
+                  <a:lnTo>
+                    <a:pt x="4941954" y="2372987"/>
+                  </a:lnTo>
+                  <a:lnTo>
+                    <a:pt x="5013576" y="2382273"/>
+                  </a:lnTo>
+                  <a:lnTo>
+                    <a:pt x="5085199" y="2391413"/>
+                  </a:lnTo>
+                  <a:lnTo>
+                    <a:pt x="5156821" y="2400409"/>
+                  </a:lnTo>
+                  <a:lnTo>
+                    <a:pt x="5228444" y="2409265"/>
+                  </a:lnTo>
+                  <a:lnTo>
+                    <a:pt x="5300066" y="2417982"/>
+                  </a:lnTo>
+                  <a:lnTo>
+                    <a:pt x="5371689" y="2426562"/>
+                  </a:lnTo>
+                  <a:lnTo>
+                    <a:pt x="5443311" y="2435008"/>
+                  </a:lnTo>
+                  <a:lnTo>
+                    <a:pt x="5514934" y="2443321"/>
+                  </a:lnTo>
+                  <a:lnTo>
+                    <a:pt x="5586557" y="2451504"/>
+                  </a:lnTo>
+                  <a:lnTo>
+                    <a:pt x="5658179" y="2459559"/>
+                  </a:lnTo>
+                  <a:lnTo>
+                    <a:pt x="5729802" y="2467488"/>
+                  </a:lnTo>
+                  <a:lnTo>
+                    <a:pt x="5801424" y="2475292"/>
+                  </a:lnTo>
+                  <a:lnTo>
+                    <a:pt x="5873047" y="2482974"/>
+                  </a:lnTo>
+                  <a:lnTo>
+                    <a:pt x="5944669" y="2490536"/>
+                  </a:lnTo>
+                  <a:lnTo>
+                    <a:pt x="6016292" y="2497979"/>
+                  </a:lnTo>
+                  <a:lnTo>
+                    <a:pt x="6087914" y="2505305"/>
+                  </a:lnTo>
+                  <a:lnTo>
+                    <a:pt x="6159537" y="2512517"/>
+                  </a:lnTo>
+                  <a:lnTo>
+                    <a:pt x="6231159" y="2519615"/>
+                  </a:lnTo>
+                  <a:lnTo>
+                    <a:pt x="6302782" y="2526602"/>
+                  </a:lnTo>
+                  <a:lnTo>
+                    <a:pt x="6374404" y="2533480"/>
+                  </a:lnTo>
+                  <a:lnTo>
+                    <a:pt x="6446027" y="2540250"/>
+                  </a:lnTo>
+                  <a:lnTo>
+                    <a:pt x="6517649" y="2546914"/>
+                  </a:lnTo>
+                  <a:lnTo>
+                    <a:pt x="6589272" y="2553473"/>
+                  </a:lnTo>
+                  <a:lnTo>
+                    <a:pt x="6660894" y="2559930"/>
+                  </a:lnTo>
+                  <a:lnTo>
+                    <a:pt x="6732517" y="2566285"/>
+                  </a:lnTo>
+                  <a:lnTo>
+                    <a:pt x="6804139" y="2572541"/>
+                  </a:lnTo>
+                  <a:lnTo>
+                    <a:pt x="6875762" y="2578699"/>
+                  </a:lnTo>
+                  <a:lnTo>
+                    <a:pt x="6947385" y="2584760"/>
+                  </a:lnTo>
+                  <a:lnTo>
+                    <a:pt x="7019007" y="2590726"/>
+                  </a:lnTo>
+                  <a:lnTo>
+                    <a:pt x="7090630" y="2596599"/>
                   </a:lnTo>
                 </a:path>
               </a:pathLst>
@@ -3915,309 +3915,309 @@
           </p:nvSpPr>
           <p:spPr>
             <a:xfrm>
-              <a:off x="1172049" y="3788346"/>
-              <a:ext cx="7090630" cy="1559184"/>
+              <a:off x="1172049" y="3795130"/>
+              <a:ext cx="7090630" cy="1551424"/>
             </a:xfrm>
             <a:custGeom>
               <a:avLst/>
               <a:pathLst>
-                <a:path w="7090630" h="1559184">
+                <a:path w="7090630" h="1551424">
                   <a:moveTo>
-                    <a:pt x="7090630" y="1559184"/>
+                    <a:pt x="7090630" y="1551424"/>
                   </a:moveTo>
                   <a:lnTo>
-                    <a:pt x="7019007" y="1553488"/>
-                  </a:lnTo>
-                  <a:lnTo>
-                    <a:pt x="6947385" y="1547636"/>
-                  </a:lnTo>
-                  <a:lnTo>
-                    <a:pt x="6875762" y="1541626"/>
-                  </a:lnTo>
-                  <a:lnTo>
-                    <a:pt x="6804139" y="1535452"/>
-                  </a:lnTo>
-                  <a:lnTo>
-                    <a:pt x="6732517" y="1529111"/>
-                  </a:lnTo>
-                  <a:lnTo>
-                    <a:pt x="6660894" y="1522597"/>
-                  </a:lnTo>
-                  <a:lnTo>
-                    <a:pt x="6589272" y="1515907"/>
-                  </a:lnTo>
-                  <a:lnTo>
-                    <a:pt x="6517649" y="1509034"/>
-                  </a:lnTo>
-                  <a:lnTo>
-                    <a:pt x="6446027" y="1501975"/>
-                  </a:lnTo>
-                  <a:lnTo>
-                    <a:pt x="6374404" y="1494725"/>
-                  </a:lnTo>
-                  <a:lnTo>
-                    <a:pt x="6302782" y="1487277"/>
-                  </a:lnTo>
-                  <a:lnTo>
-                    <a:pt x="6231159" y="1479627"/>
-                  </a:lnTo>
-                  <a:lnTo>
-                    <a:pt x="6159537" y="1471769"/>
-                  </a:lnTo>
-                  <a:lnTo>
-                    <a:pt x="6087914" y="1463698"/>
-                  </a:lnTo>
-                  <a:lnTo>
-                    <a:pt x="6016292" y="1455408"/>
-                  </a:lnTo>
-                  <a:lnTo>
-                    <a:pt x="5944669" y="1446892"/>
-                  </a:lnTo>
-                  <a:lnTo>
-                    <a:pt x="5873047" y="1438145"/>
-                  </a:lnTo>
-                  <a:lnTo>
-                    <a:pt x="5801424" y="1429160"/>
-                  </a:lnTo>
-                  <a:lnTo>
-                    <a:pt x="5729802" y="1419932"/>
-                  </a:lnTo>
-                  <a:lnTo>
-                    <a:pt x="5658179" y="1410452"/>
-                  </a:lnTo>
-                  <a:lnTo>
-                    <a:pt x="5586557" y="1400716"/>
-                  </a:lnTo>
-                  <a:lnTo>
-                    <a:pt x="5514934" y="1390714"/>
-                  </a:lnTo>
-                  <a:lnTo>
-                    <a:pt x="5443311" y="1380441"/>
-                  </a:lnTo>
-                  <a:lnTo>
-                    <a:pt x="5371689" y="1369889"/>
-                  </a:lnTo>
-                  <a:lnTo>
-                    <a:pt x="5300066" y="1359051"/>
-                  </a:lnTo>
-                  <a:lnTo>
-                    <a:pt x="5228444" y="1347917"/>
-                  </a:lnTo>
-                  <a:lnTo>
-                    <a:pt x="5156821" y="1336482"/>
-                  </a:lnTo>
-                  <a:lnTo>
-                    <a:pt x="5085199" y="1324736"/>
-                  </a:lnTo>
-                  <a:lnTo>
-                    <a:pt x="5013576" y="1312671"/>
-                  </a:lnTo>
-                  <a:lnTo>
-                    <a:pt x="4941954" y="1300278"/>
-                  </a:lnTo>
-                  <a:lnTo>
-                    <a:pt x="4870331" y="1287548"/>
-                  </a:lnTo>
-                  <a:lnTo>
-                    <a:pt x="4798709" y="1274473"/>
-                  </a:lnTo>
-                  <a:lnTo>
-                    <a:pt x="4727086" y="1261042"/>
-                  </a:lnTo>
-                  <a:lnTo>
-                    <a:pt x="4655464" y="1247247"/>
-                  </a:lnTo>
-                  <a:lnTo>
-                    <a:pt x="4583841" y="1233077"/>
-                  </a:lnTo>
-                  <a:lnTo>
-                    <a:pt x="4512219" y="1218522"/>
-                  </a:lnTo>
-                  <a:lnTo>
-                    <a:pt x="4440596" y="1203572"/>
-                  </a:lnTo>
-                  <a:lnTo>
-                    <a:pt x="4368974" y="1188215"/>
-                  </a:lnTo>
-                  <a:lnTo>
-                    <a:pt x="4297351" y="1172442"/>
-                  </a:lnTo>
-                  <a:lnTo>
-                    <a:pt x="4225729" y="1156240"/>
-                  </a:lnTo>
-                  <a:lnTo>
-                    <a:pt x="4154106" y="1139598"/>
-                  </a:lnTo>
-                  <a:lnTo>
-                    <a:pt x="4082483" y="1122503"/>
-                  </a:lnTo>
-                  <a:lnTo>
-                    <a:pt x="4010861" y="1104945"/>
-                  </a:lnTo>
-                  <a:lnTo>
-                    <a:pt x="3939238" y="1086909"/>
-                  </a:lnTo>
-                  <a:lnTo>
-                    <a:pt x="3867616" y="1068384"/>
-                  </a:lnTo>
-                  <a:lnTo>
-                    <a:pt x="3795993" y="1049355"/>
-                  </a:lnTo>
-                  <a:lnTo>
-                    <a:pt x="3724371" y="1029810"/>
-                  </a:lnTo>
-                  <a:lnTo>
-                    <a:pt x="3652748" y="1009733"/>
-                  </a:lnTo>
-                  <a:lnTo>
-                    <a:pt x="3581126" y="989111"/>
-                  </a:lnTo>
-                  <a:lnTo>
-                    <a:pt x="3509503" y="967930"/>
-                  </a:lnTo>
-                  <a:lnTo>
-                    <a:pt x="3437881" y="946172"/>
-                  </a:lnTo>
-                  <a:lnTo>
-                    <a:pt x="3366258" y="930223"/>
-                  </a:lnTo>
-                  <a:lnTo>
-                    <a:pt x="3294636" y="916800"/>
-                  </a:lnTo>
-                  <a:lnTo>
-                    <a:pt x="3223013" y="903162"/>
-                  </a:lnTo>
-                  <a:lnTo>
-                    <a:pt x="3151391" y="889306"/>
-                  </a:lnTo>
-                  <a:lnTo>
-                    <a:pt x="3079768" y="875228"/>
-                  </a:lnTo>
-                  <a:lnTo>
-                    <a:pt x="3008146" y="860924"/>
-                  </a:lnTo>
-                  <a:lnTo>
-                    <a:pt x="2936523" y="846392"/>
-                  </a:lnTo>
-                  <a:lnTo>
-                    <a:pt x="2864901" y="831627"/>
-                  </a:lnTo>
-                  <a:lnTo>
-                    <a:pt x="2793278" y="816626"/>
-                  </a:lnTo>
-                  <a:lnTo>
-                    <a:pt x="2721655" y="801384"/>
-                  </a:lnTo>
-                  <a:lnTo>
-                    <a:pt x="2650033" y="785899"/>
-                  </a:lnTo>
-                  <a:lnTo>
-                    <a:pt x="2578410" y="770166"/>
-                  </a:lnTo>
-                  <a:lnTo>
-                    <a:pt x="2506788" y="754181"/>
-                  </a:lnTo>
-                  <a:lnTo>
-                    <a:pt x="2435165" y="737940"/>
-                  </a:lnTo>
-                  <a:lnTo>
-                    <a:pt x="2363543" y="721439"/>
-                  </a:lnTo>
-                  <a:lnTo>
-                    <a:pt x="2291920" y="704675"/>
-                  </a:lnTo>
-                  <a:lnTo>
-                    <a:pt x="2220298" y="687641"/>
-                  </a:lnTo>
-                  <a:lnTo>
-                    <a:pt x="2148675" y="670336"/>
-                  </a:lnTo>
-                  <a:lnTo>
-                    <a:pt x="2077053" y="652753"/>
-                  </a:lnTo>
-                  <a:lnTo>
-                    <a:pt x="2005430" y="634889"/>
-                  </a:lnTo>
-                  <a:lnTo>
-                    <a:pt x="1933808" y="616739"/>
-                  </a:lnTo>
-                  <a:lnTo>
-                    <a:pt x="1862185" y="598298"/>
-                  </a:lnTo>
-                  <a:lnTo>
-                    <a:pt x="1790563" y="579562"/>
-                  </a:lnTo>
-                  <a:lnTo>
-                    <a:pt x="1718940" y="560527"/>
-                  </a:lnTo>
-                  <a:lnTo>
-                    <a:pt x="1647318" y="541186"/>
-                  </a:lnTo>
-                  <a:lnTo>
-                    <a:pt x="1575695" y="521537"/>
-                  </a:lnTo>
-                  <a:lnTo>
-                    <a:pt x="1504073" y="501572"/>
-                  </a:lnTo>
-                  <a:lnTo>
-                    <a:pt x="1432450" y="481289"/>
-                  </a:lnTo>
-                  <a:lnTo>
-                    <a:pt x="1360827" y="460680"/>
-                  </a:lnTo>
-                  <a:lnTo>
-                    <a:pt x="1289205" y="439742"/>
-                  </a:lnTo>
-                  <a:lnTo>
-                    <a:pt x="1217582" y="418468"/>
-                  </a:lnTo>
-                  <a:lnTo>
-                    <a:pt x="1145960" y="396854"/>
-                  </a:lnTo>
-                  <a:lnTo>
-                    <a:pt x="1074337" y="374895"/>
-                  </a:lnTo>
-                  <a:lnTo>
-                    <a:pt x="1002715" y="352583"/>
-                  </a:lnTo>
-                  <a:lnTo>
-                    <a:pt x="931092" y="329915"/>
-                  </a:lnTo>
-                  <a:lnTo>
-                    <a:pt x="859470" y="306883"/>
-                  </a:lnTo>
-                  <a:lnTo>
-                    <a:pt x="787847" y="283484"/>
-                  </a:lnTo>
-                  <a:lnTo>
-                    <a:pt x="716225" y="259709"/>
-                  </a:lnTo>
-                  <a:lnTo>
-                    <a:pt x="644602" y="235554"/>
-                  </a:lnTo>
-                  <a:lnTo>
-                    <a:pt x="572980" y="211013"/>
-                  </a:lnTo>
-                  <a:lnTo>
-                    <a:pt x="501357" y="186079"/>
-                  </a:lnTo>
-                  <a:lnTo>
-                    <a:pt x="429735" y="160745"/>
-                  </a:lnTo>
-                  <a:lnTo>
-                    <a:pt x="358112" y="135006"/>
-                  </a:lnTo>
-                  <a:lnTo>
-                    <a:pt x="286490" y="108856"/>
-                  </a:lnTo>
-                  <a:lnTo>
-                    <a:pt x="214867" y="82286"/>
-                  </a:lnTo>
-                  <a:lnTo>
-                    <a:pt x="143245" y="55292"/>
-                  </a:lnTo>
-                  <a:lnTo>
-                    <a:pt x="71622" y="27865"/>
+                    <a:pt x="7019007" y="1545721"/>
+                  </a:lnTo>
+                  <a:lnTo>
+                    <a:pt x="6947385" y="1539863"/>
+                  </a:lnTo>
+                  <a:lnTo>
+                    <a:pt x="6875762" y="1533846"/>
+                  </a:lnTo>
+                  <a:lnTo>
+                    <a:pt x="6804139" y="1527666"/>
+                  </a:lnTo>
+                  <a:lnTo>
+                    <a:pt x="6732517" y="1521320"/>
+                  </a:lnTo>
+                  <a:lnTo>
+                    <a:pt x="6660894" y="1514801"/>
+                  </a:lnTo>
+                  <a:lnTo>
+                    <a:pt x="6589272" y="1508106"/>
+                  </a:lnTo>
+                  <a:lnTo>
+                    <a:pt x="6517649" y="1501230"/>
+                  </a:lnTo>
+                  <a:lnTo>
+                    <a:pt x="6446027" y="1494167"/>
+                  </a:lnTo>
+                  <a:lnTo>
+                    <a:pt x="6374404" y="1486914"/>
+                  </a:lnTo>
+                  <a:lnTo>
+                    <a:pt x="6302782" y="1479464"/>
+                  </a:lnTo>
+                  <a:lnTo>
+                    <a:pt x="6231159" y="1471812"/>
+                  </a:lnTo>
+                  <a:lnTo>
+                    <a:pt x="6159537" y="1463953"/>
+                  </a:lnTo>
+                  <a:lnTo>
+                    <a:pt x="6087914" y="1455882"/>
+                  </a:lnTo>
+                  <a:lnTo>
+                    <a:pt x="6016292" y="1447592"/>
+                  </a:lnTo>
+                  <a:lnTo>
+                    <a:pt x="5944669" y="1439077"/>
+                  </a:lnTo>
+                  <a:lnTo>
+                    <a:pt x="5873047" y="1430332"/>
+                  </a:lnTo>
+                  <a:lnTo>
+                    <a:pt x="5801424" y="1421350"/>
+                  </a:lnTo>
+                  <a:lnTo>
+                    <a:pt x="5729802" y="1412126"/>
+                  </a:lnTo>
+                  <a:lnTo>
+                    <a:pt x="5658179" y="1402651"/>
+                  </a:lnTo>
+                  <a:lnTo>
+                    <a:pt x="5586557" y="1392920"/>
+                  </a:lnTo>
+                  <a:lnTo>
+                    <a:pt x="5514934" y="1382926"/>
+                  </a:lnTo>
+                  <a:lnTo>
+                    <a:pt x="5443311" y="1372661"/>
+                  </a:lnTo>
+                  <a:lnTo>
+                    <a:pt x="5371689" y="1362118"/>
+                  </a:lnTo>
+                  <a:lnTo>
+                    <a:pt x="5300066" y="1351289"/>
+                  </a:lnTo>
+                  <a:lnTo>
+                    <a:pt x="5228444" y="1340168"/>
+                  </a:lnTo>
+                  <a:lnTo>
+                    <a:pt x="5156821" y="1328746"/>
+                  </a:lnTo>
+                  <a:lnTo>
+                    <a:pt x="5085199" y="1317014"/>
+                  </a:lnTo>
+                  <a:lnTo>
+                    <a:pt x="5013576" y="1304965"/>
+                  </a:lnTo>
+                  <a:lnTo>
+                    <a:pt x="4941954" y="1292589"/>
+                  </a:lnTo>
+                  <a:lnTo>
+                    <a:pt x="4870331" y="1279879"/>
+                  </a:lnTo>
+                  <a:lnTo>
+                    <a:pt x="4798709" y="1266824"/>
+                  </a:lnTo>
+                  <a:lnTo>
+                    <a:pt x="4727086" y="1253416"/>
+                  </a:lnTo>
+                  <a:lnTo>
+                    <a:pt x="4655464" y="1239645"/>
+                  </a:lnTo>
+                  <a:lnTo>
+                    <a:pt x="4583841" y="1225502"/>
+                  </a:lnTo>
+                  <a:lnTo>
+                    <a:pt x="4512219" y="1210975"/>
+                  </a:lnTo>
+                  <a:lnTo>
+                    <a:pt x="4440596" y="1196055"/>
+                  </a:lnTo>
+                  <a:lnTo>
+                    <a:pt x="4368974" y="1180731"/>
+                  </a:lnTo>
+                  <a:lnTo>
+                    <a:pt x="4297351" y="1164993"/>
+                  </a:lnTo>
+                  <a:lnTo>
+                    <a:pt x="4225729" y="1148828"/>
+                  </a:lnTo>
+                  <a:lnTo>
+                    <a:pt x="4154106" y="1132226"/>
+                  </a:lnTo>
+                  <a:lnTo>
+                    <a:pt x="4082483" y="1115175"/>
+                  </a:lnTo>
+                  <a:lnTo>
+                    <a:pt x="4010861" y="1097661"/>
+                  </a:lnTo>
+                  <a:lnTo>
+                    <a:pt x="3939238" y="1079674"/>
+                  </a:lnTo>
+                  <a:lnTo>
+                    <a:pt x="3867616" y="1061200"/>
+                  </a:lnTo>
+                  <a:lnTo>
+                    <a:pt x="3795993" y="1042225"/>
+                  </a:lnTo>
+                  <a:lnTo>
+                    <a:pt x="3724371" y="1022738"/>
+                  </a:lnTo>
+                  <a:lnTo>
+                    <a:pt x="3652748" y="1002722"/>
+                  </a:lnTo>
+                  <a:lnTo>
+                    <a:pt x="3581126" y="982165"/>
+                  </a:lnTo>
+                  <a:lnTo>
+                    <a:pt x="3509503" y="961051"/>
+                  </a:lnTo>
+                  <a:lnTo>
+                    <a:pt x="3437881" y="939365"/>
+                  </a:lnTo>
+                  <a:lnTo>
+                    <a:pt x="3366258" y="923486"/>
+                  </a:lnTo>
+                  <a:lnTo>
+                    <a:pt x="3294636" y="910132"/>
+                  </a:lnTo>
+                  <a:lnTo>
+                    <a:pt x="3223013" y="896566"/>
+                  </a:lnTo>
+                  <a:lnTo>
+                    <a:pt x="3151391" y="882783"/>
+                  </a:lnTo>
+                  <a:lnTo>
+                    <a:pt x="3079768" y="868781"/>
+                  </a:lnTo>
+                  <a:lnTo>
+                    <a:pt x="3008146" y="854557"/>
+                  </a:lnTo>
+                  <a:lnTo>
+                    <a:pt x="2936523" y="840105"/>
+                  </a:lnTo>
+                  <a:lnTo>
+                    <a:pt x="2864901" y="825424"/>
+                  </a:lnTo>
+                  <a:lnTo>
+                    <a:pt x="2793278" y="810508"/>
+                  </a:lnTo>
+                  <a:lnTo>
+                    <a:pt x="2721655" y="795356"/>
+                  </a:lnTo>
+                  <a:lnTo>
+                    <a:pt x="2650033" y="779961"/>
+                  </a:lnTo>
+                  <a:lnTo>
+                    <a:pt x="2578410" y="764322"/>
+                  </a:lnTo>
+                  <a:lnTo>
+                    <a:pt x="2506788" y="748434"/>
+                  </a:lnTo>
+                  <a:lnTo>
+                    <a:pt x="2435165" y="732293"/>
+                  </a:lnTo>
+                  <a:lnTo>
+                    <a:pt x="2363543" y="715895"/>
+                  </a:lnTo>
+                  <a:lnTo>
+                    <a:pt x="2291920" y="699235"/>
+                  </a:lnTo>
+                  <a:lnTo>
+                    <a:pt x="2220298" y="682311"/>
+                  </a:lnTo>
+                  <a:lnTo>
+                    <a:pt x="2148675" y="665116"/>
+                  </a:lnTo>
+                  <a:lnTo>
+                    <a:pt x="2077053" y="647649"/>
+                  </a:lnTo>
+                  <a:lnTo>
+                    <a:pt x="2005430" y="629903"/>
+                  </a:lnTo>
+                  <a:lnTo>
+                    <a:pt x="1933808" y="611874"/>
+                  </a:lnTo>
+                  <a:lnTo>
+                    <a:pt x="1862185" y="593558"/>
+                  </a:lnTo>
+                  <a:lnTo>
+                    <a:pt x="1790563" y="574951"/>
+                  </a:lnTo>
+                  <a:lnTo>
+                    <a:pt x="1718940" y="556047"/>
+                  </a:lnTo>
+                  <a:lnTo>
+                    <a:pt x="1647318" y="536843"/>
+                  </a:lnTo>
+                  <a:lnTo>
+                    <a:pt x="1575695" y="517332"/>
+                  </a:lnTo>
+                  <a:lnTo>
+                    <a:pt x="1504073" y="497511"/>
+                  </a:lnTo>
+                  <a:lnTo>
+                    <a:pt x="1432450" y="477374"/>
+                  </a:lnTo>
+                  <a:lnTo>
+                    <a:pt x="1360827" y="456917"/>
+                  </a:lnTo>
+                  <a:lnTo>
+                    <a:pt x="1289205" y="436134"/>
+                  </a:lnTo>
+                  <a:lnTo>
+                    <a:pt x="1217582" y="415020"/>
+                  </a:lnTo>
+                  <a:lnTo>
+                    <a:pt x="1145960" y="393569"/>
+                  </a:lnTo>
+                  <a:lnTo>
+                    <a:pt x="1074337" y="371777"/>
+                  </a:lnTo>
+                  <a:lnTo>
+                    <a:pt x="1002715" y="349639"/>
+                  </a:lnTo>
+                  <a:lnTo>
+                    <a:pt x="931092" y="327147"/>
+                  </a:lnTo>
+                  <a:lnTo>
+                    <a:pt x="859470" y="304298"/>
+                  </a:lnTo>
+                  <a:lnTo>
+                    <a:pt x="787847" y="281084"/>
+                  </a:lnTo>
+                  <a:lnTo>
+                    <a:pt x="716225" y="257501"/>
+                  </a:lnTo>
+                  <a:lnTo>
+                    <a:pt x="644602" y="233543"/>
+                  </a:lnTo>
+                  <a:lnTo>
+                    <a:pt x="572980" y="209203"/>
+                  </a:lnTo>
+                  <a:lnTo>
+                    <a:pt x="501357" y="184475"/>
+                  </a:lnTo>
+                  <a:lnTo>
+                    <a:pt x="429735" y="159354"/>
+                  </a:lnTo>
+                  <a:lnTo>
+                    <a:pt x="358112" y="133833"/>
+                  </a:lnTo>
+                  <a:lnTo>
+                    <a:pt x="286490" y="107905"/>
+                  </a:lnTo>
+                  <a:lnTo>
+                    <a:pt x="214867" y="81565"/>
+                  </a:lnTo>
+                  <a:lnTo>
+                    <a:pt x="143245" y="54805"/>
+                  </a:lnTo>
+                  <a:lnTo>
+                    <a:pt x="71622" y="27618"/>
                   </a:lnTo>
                   <a:lnTo>
                     <a:pt x="0" y="0"/>
@@ -4240,312 +4240,312 @@
           </p:nvSpPr>
           <p:spPr>
             <a:xfrm>
-              <a:off x="1172049" y="3261990"/>
-              <a:ext cx="7090630" cy="2017721"/>
+              <a:off x="1172049" y="3271334"/>
+              <a:ext cx="7090630" cy="2007156"/>
             </a:xfrm>
             <a:custGeom>
               <a:avLst/>
               <a:pathLst>
-                <a:path w="7090630" h="2017721">
+                <a:path w="7090630" h="2007156">
                   <a:moveTo>
                     <a:pt x="0" y="0"/>
                   </a:moveTo>
                   <a:lnTo>
-                    <a:pt x="71622" y="48461"/>
-                  </a:lnTo>
-                  <a:lnTo>
-                    <a:pt x="143245" y="95899"/>
-                  </a:lnTo>
-                  <a:lnTo>
-                    <a:pt x="214867" y="142336"/>
-                  </a:lnTo>
-                  <a:lnTo>
-                    <a:pt x="286490" y="187792"/>
-                  </a:lnTo>
-                  <a:lnTo>
-                    <a:pt x="358112" y="232289"/>
-                  </a:lnTo>
-                  <a:lnTo>
-                    <a:pt x="429735" y="275846"/>
-                  </a:lnTo>
-                  <a:lnTo>
-                    <a:pt x="501357" y="318483"/>
-                  </a:lnTo>
-                  <a:lnTo>
-                    <a:pt x="572980" y="360220"/>
-                  </a:lnTo>
-                  <a:lnTo>
-                    <a:pt x="644602" y="401076"/>
-                  </a:lnTo>
-                  <a:lnTo>
-                    <a:pt x="716225" y="441069"/>
-                  </a:lnTo>
-                  <a:lnTo>
-                    <a:pt x="787847" y="480218"/>
-                  </a:lnTo>
-                  <a:lnTo>
-                    <a:pt x="859470" y="518541"/>
-                  </a:lnTo>
-                  <a:lnTo>
-                    <a:pt x="931092" y="556054"/>
-                  </a:lnTo>
-                  <a:lnTo>
-                    <a:pt x="1002715" y="592775"/>
-                  </a:lnTo>
-                  <a:lnTo>
-                    <a:pt x="1074337" y="628721"/>
-                  </a:lnTo>
-                  <a:lnTo>
-                    <a:pt x="1145960" y="663908"/>
-                  </a:lnTo>
-                  <a:lnTo>
-                    <a:pt x="1217582" y="698351"/>
-                  </a:lnTo>
-                  <a:lnTo>
-                    <a:pt x="1289205" y="732068"/>
-                  </a:lnTo>
-                  <a:lnTo>
-                    <a:pt x="1360827" y="765073"/>
-                  </a:lnTo>
-                  <a:lnTo>
-                    <a:pt x="1432450" y="797381"/>
-                  </a:lnTo>
-                  <a:lnTo>
-                    <a:pt x="1504073" y="829007"/>
-                  </a:lnTo>
-                  <a:lnTo>
-                    <a:pt x="1575695" y="859965"/>
-                  </a:lnTo>
-                  <a:lnTo>
-                    <a:pt x="1647318" y="890269"/>
-                  </a:lnTo>
-                  <a:lnTo>
-                    <a:pt x="1718940" y="919934"/>
-                  </a:lnTo>
-                  <a:lnTo>
-                    <a:pt x="1790563" y="948972"/>
-                  </a:lnTo>
-                  <a:lnTo>
-                    <a:pt x="1862185" y="977397"/>
-                  </a:lnTo>
-                  <a:lnTo>
-                    <a:pt x="1933808" y="1005222"/>
-                  </a:lnTo>
-                  <a:lnTo>
-                    <a:pt x="2005430" y="1032460"/>
-                  </a:lnTo>
-                  <a:lnTo>
-                    <a:pt x="2077053" y="1059122"/>
-                  </a:lnTo>
-                  <a:lnTo>
-                    <a:pt x="2148675" y="1085222"/>
-                  </a:lnTo>
-                  <a:lnTo>
-                    <a:pt x="2220298" y="1110770"/>
-                  </a:lnTo>
-                  <a:lnTo>
-                    <a:pt x="2291920" y="1135779"/>
-                  </a:lnTo>
-                  <a:lnTo>
-                    <a:pt x="2363543" y="1160260"/>
-                  </a:lnTo>
-                  <a:lnTo>
-                    <a:pt x="2435165" y="1184224"/>
-                  </a:lnTo>
-                  <a:lnTo>
-                    <a:pt x="2506788" y="1207682"/>
-                  </a:lnTo>
-                  <a:lnTo>
-                    <a:pt x="2578410" y="1230645"/>
-                  </a:lnTo>
-                  <a:lnTo>
-                    <a:pt x="2650033" y="1253123"/>
-                  </a:lnTo>
-                  <a:lnTo>
-                    <a:pt x="2721655" y="1275126"/>
-                  </a:lnTo>
-                  <a:lnTo>
-                    <a:pt x="2793278" y="1296665"/>
-                  </a:lnTo>
-                  <a:lnTo>
-                    <a:pt x="2864901" y="1317749"/>
-                  </a:lnTo>
-                  <a:lnTo>
-                    <a:pt x="2936523" y="1338388"/>
-                  </a:lnTo>
-                  <a:lnTo>
-                    <a:pt x="3008146" y="1358591"/>
-                  </a:lnTo>
-                  <a:lnTo>
-                    <a:pt x="3079768" y="1378368"/>
-                  </a:lnTo>
-                  <a:lnTo>
-                    <a:pt x="3151391" y="1397727"/>
-                  </a:lnTo>
-                  <a:lnTo>
-                    <a:pt x="3223013" y="1416677"/>
-                  </a:lnTo>
-                  <a:lnTo>
-                    <a:pt x="3294636" y="1435227"/>
-                  </a:lnTo>
-                  <a:lnTo>
-                    <a:pt x="3366258" y="1453386"/>
-                  </a:lnTo>
-                  <a:lnTo>
-                    <a:pt x="3437881" y="1471161"/>
-                  </a:lnTo>
-                  <a:lnTo>
-                    <a:pt x="3509503" y="1488561"/>
-                  </a:lnTo>
-                  <a:lnTo>
-                    <a:pt x="3581126" y="1505593"/>
-                  </a:lnTo>
-                  <a:lnTo>
-                    <a:pt x="3652748" y="1522266"/>
-                  </a:lnTo>
-                  <a:lnTo>
-                    <a:pt x="3724371" y="1538587"/>
-                  </a:lnTo>
-                  <a:lnTo>
-                    <a:pt x="3795993" y="1554563"/>
-                  </a:lnTo>
-                  <a:lnTo>
-                    <a:pt x="3867616" y="1570202"/>
-                  </a:lnTo>
-                  <a:lnTo>
-                    <a:pt x="3939238" y="1585510"/>
-                  </a:lnTo>
-                  <a:lnTo>
-                    <a:pt x="4010861" y="1600496"/>
-                  </a:lnTo>
-                  <a:lnTo>
-                    <a:pt x="4082483" y="1615165"/>
-                  </a:lnTo>
-                  <a:lnTo>
-                    <a:pt x="4154106" y="1629524"/>
-                  </a:lnTo>
-                  <a:lnTo>
-                    <a:pt x="4225729" y="1643580"/>
-                  </a:lnTo>
-                  <a:lnTo>
-                    <a:pt x="4297351" y="1657340"/>
-                  </a:lnTo>
-                  <a:lnTo>
-                    <a:pt x="4368974" y="1670809"/>
-                  </a:lnTo>
-                  <a:lnTo>
-                    <a:pt x="4440596" y="1683993"/>
-                  </a:lnTo>
-                  <a:lnTo>
-                    <a:pt x="4512219" y="1696899"/>
-                  </a:lnTo>
-                  <a:lnTo>
-                    <a:pt x="4583841" y="1709533"/>
-                  </a:lnTo>
-                  <a:lnTo>
-                    <a:pt x="4655464" y="1721900"/>
-                  </a:lnTo>
-                  <a:lnTo>
-                    <a:pt x="4727086" y="1734005"/>
-                  </a:lnTo>
-                  <a:lnTo>
-                    <a:pt x="4798709" y="1745856"/>
-                  </a:lnTo>
-                  <a:lnTo>
-                    <a:pt x="4870331" y="1757456"/>
-                  </a:lnTo>
-                  <a:lnTo>
-                    <a:pt x="4941954" y="1768811"/>
-                  </a:lnTo>
-                  <a:lnTo>
-                    <a:pt x="5013576" y="1779926"/>
-                  </a:lnTo>
-                  <a:lnTo>
-                    <a:pt x="5085199" y="1790807"/>
-                  </a:lnTo>
-                  <a:lnTo>
-                    <a:pt x="5156821" y="1801457"/>
-                  </a:lnTo>
-                  <a:lnTo>
-                    <a:pt x="5228444" y="1811883"/>
-                  </a:lnTo>
-                  <a:lnTo>
-                    <a:pt x="5300066" y="1822089"/>
-                  </a:lnTo>
-                  <a:lnTo>
-                    <a:pt x="5371689" y="1832080"/>
-                  </a:lnTo>
-                  <a:lnTo>
-                    <a:pt x="5443311" y="1841859"/>
-                  </a:lnTo>
-                  <a:lnTo>
-                    <a:pt x="5514934" y="1851432"/>
-                  </a:lnTo>
-                  <a:lnTo>
-                    <a:pt x="5586557" y="1860803"/>
-                  </a:lnTo>
-                  <a:lnTo>
-                    <a:pt x="5658179" y="1869976"/>
-                  </a:lnTo>
-                  <a:lnTo>
-                    <a:pt x="5729802" y="1878955"/>
-                  </a:lnTo>
-                  <a:lnTo>
-                    <a:pt x="5801424" y="1887745"/>
-                  </a:lnTo>
-                  <a:lnTo>
-                    <a:pt x="5873047" y="1896349"/>
-                  </a:lnTo>
-                  <a:lnTo>
-                    <a:pt x="5944669" y="1904772"/>
-                  </a:lnTo>
-                  <a:lnTo>
-                    <a:pt x="6016292" y="1913016"/>
-                  </a:lnTo>
-                  <a:lnTo>
-                    <a:pt x="6087914" y="1921087"/>
-                  </a:lnTo>
-                  <a:lnTo>
-                    <a:pt x="6159537" y="1928987"/>
-                  </a:lnTo>
-                  <a:lnTo>
-                    <a:pt x="6231159" y="1936720"/>
-                  </a:lnTo>
-                  <a:lnTo>
-                    <a:pt x="6302782" y="1944291"/>
-                  </a:lnTo>
-                  <a:lnTo>
-                    <a:pt x="6374404" y="1951701"/>
-                  </a:lnTo>
-                  <a:lnTo>
-                    <a:pt x="6446027" y="1958955"/>
-                  </a:lnTo>
-                  <a:lnTo>
-                    <a:pt x="6517649" y="1966055"/>
-                  </a:lnTo>
-                  <a:lnTo>
-                    <a:pt x="6589272" y="1973006"/>
-                  </a:lnTo>
-                  <a:lnTo>
-                    <a:pt x="6660894" y="1979810"/>
-                  </a:lnTo>
-                  <a:lnTo>
-                    <a:pt x="6732517" y="1986470"/>
-                  </a:lnTo>
-                  <a:lnTo>
-                    <a:pt x="6804139" y="1992990"/>
-                  </a:lnTo>
-                  <a:lnTo>
-                    <a:pt x="6875762" y="1999372"/>
-                  </a:lnTo>
-                  <a:lnTo>
-                    <a:pt x="6947385" y="2005619"/>
-                  </a:lnTo>
-                  <a:lnTo>
-                    <a:pt x="7019007" y="2011735"/>
-                  </a:lnTo>
-                  <a:lnTo>
-                    <a:pt x="7090630" y="2017721"/>
+                    <a:pt x="71622" y="48072"/>
+                  </a:lnTo>
+                  <a:lnTo>
+                    <a:pt x="143245" y="95134"/>
+                  </a:lnTo>
+                  <a:lnTo>
+                    <a:pt x="214867" y="141206"/>
+                  </a:lnTo>
+                  <a:lnTo>
+                    <a:pt x="286490" y="186309"/>
+                  </a:lnTo>
+                  <a:lnTo>
+                    <a:pt x="358112" y="230464"/>
+                  </a:lnTo>
+                  <a:lnTo>
+                    <a:pt x="429735" y="273690"/>
+                  </a:lnTo>
+                  <a:lnTo>
+                    <a:pt x="501357" y="316007"/>
+                  </a:lnTo>
+                  <a:lnTo>
+                    <a:pt x="572980" y="357435"/>
+                  </a:lnTo>
+                  <a:lnTo>
+                    <a:pt x="644602" y="397990"/>
+                  </a:lnTo>
+                  <a:lnTo>
+                    <a:pt x="716225" y="437694"/>
+                  </a:lnTo>
+                  <a:lnTo>
+                    <a:pt x="787847" y="476562"/>
+                  </a:lnTo>
+                  <a:lnTo>
+                    <a:pt x="859470" y="514612"/>
+                  </a:lnTo>
+                  <a:lnTo>
+                    <a:pt x="931092" y="551863"/>
+                  </a:lnTo>
+                  <a:lnTo>
+                    <a:pt x="1002715" y="588330"/>
+                  </a:lnTo>
+                  <a:lnTo>
+                    <a:pt x="1074337" y="624030"/>
+                  </a:lnTo>
+                  <a:lnTo>
+                    <a:pt x="1145960" y="658980"/>
+                  </a:lnTo>
+                  <a:lnTo>
+                    <a:pt x="1217582" y="693194"/>
+                  </a:lnTo>
+                  <a:lnTo>
+                    <a:pt x="1289205" y="726689"/>
+                  </a:lnTo>
+                  <a:lnTo>
+                    <a:pt x="1360827" y="759479"/>
+                  </a:lnTo>
+                  <a:lnTo>
+                    <a:pt x="1432450" y="791580"/>
+                  </a:lnTo>
+                  <a:lnTo>
+                    <a:pt x="1504073" y="823006"/>
+                  </a:lnTo>
+                  <a:lnTo>
+                    <a:pt x="1575695" y="853771"/>
+                  </a:lnTo>
+                  <a:lnTo>
+                    <a:pt x="1647318" y="883889"/>
+                  </a:lnTo>
+                  <a:lnTo>
+                    <a:pt x="1718940" y="913374"/>
+                  </a:lnTo>
+                  <a:lnTo>
+                    <a:pt x="1790563" y="942238"/>
+                  </a:lnTo>
+                  <a:lnTo>
+                    <a:pt x="1862185" y="970496"/>
+                  </a:lnTo>
+                  <a:lnTo>
+                    <a:pt x="1933808" y="998159"/>
+                  </a:lnTo>
+                  <a:lnTo>
+                    <a:pt x="2005430" y="1025241"/>
+                  </a:lnTo>
+                  <a:lnTo>
+                    <a:pt x="2077053" y="1051753"/>
+                  </a:lnTo>
+                  <a:lnTo>
+                    <a:pt x="2148675" y="1077707"/>
+                  </a:lnTo>
+                  <a:lnTo>
+                    <a:pt x="2220298" y="1103116"/>
+                  </a:lnTo>
+                  <a:lnTo>
+                    <a:pt x="2291920" y="1127990"/>
+                  </a:lnTo>
+                  <a:lnTo>
+                    <a:pt x="2363543" y="1152341"/>
+                  </a:lnTo>
+                  <a:lnTo>
+                    <a:pt x="2435165" y="1176180"/>
+                  </a:lnTo>
+                  <a:lnTo>
+                    <a:pt x="2506788" y="1199518"/>
+                  </a:lnTo>
+                  <a:lnTo>
+                    <a:pt x="2578410" y="1222365"/>
+                  </a:lnTo>
+                  <a:lnTo>
+                    <a:pt x="2650033" y="1244731"/>
+                  </a:lnTo>
+                  <a:lnTo>
+                    <a:pt x="2721655" y="1266627"/>
+                  </a:lnTo>
+                  <a:lnTo>
+                    <a:pt x="2793278" y="1288063"/>
+                  </a:lnTo>
+                  <a:lnTo>
+                    <a:pt x="2864901" y="1309048"/>
+                  </a:lnTo>
+                  <a:lnTo>
+                    <a:pt x="2936523" y="1329591"/>
+                  </a:lnTo>
+                  <a:lnTo>
+                    <a:pt x="3008146" y="1349703"/>
+                  </a:lnTo>
+                  <a:lnTo>
+                    <a:pt x="3079768" y="1369391"/>
+                  </a:lnTo>
+                  <a:lnTo>
+                    <a:pt x="3151391" y="1388666"/>
+                  </a:lnTo>
+                  <a:lnTo>
+                    <a:pt x="3223013" y="1407535"/>
+                  </a:lnTo>
+                  <a:lnTo>
+                    <a:pt x="3294636" y="1426007"/>
+                  </a:lnTo>
+                  <a:lnTo>
+                    <a:pt x="3366258" y="1444091"/>
+                  </a:lnTo>
+                  <a:lnTo>
+                    <a:pt x="3437881" y="1461795"/>
+                  </a:lnTo>
+                  <a:lnTo>
+                    <a:pt x="3509503" y="1479126"/>
+                  </a:lnTo>
+                  <a:lnTo>
+                    <a:pt x="3581126" y="1496093"/>
+                  </a:lnTo>
+                  <a:lnTo>
+                    <a:pt x="3652748" y="1512703"/>
+                  </a:lnTo>
+                  <a:lnTo>
+                    <a:pt x="3724371" y="1528963"/>
+                  </a:lnTo>
+                  <a:lnTo>
+                    <a:pt x="3795993" y="1544882"/>
+                  </a:lnTo>
+                  <a:lnTo>
+                    <a:pt x="3867616" y="1560466"/>
+                  </a:lnTo>
+                  <a:lnTo>
+                    <a:pt x="3939238" y="1575722"/>
+                  </a:lnTo>
+                  <a:lnTo>
+                    <a:pt x="4010861" y="1590657"/>
+                  </a:lnTo>
+                  <a:lnTo>
+                    <a:pt x="4082483" y="1605279"/>
+                  </a:lnTo>
+                  <a:lnTo>
+                    <a:pt x="4154106" y="1619592"/>
+                  </a:lnTo>
+                  <a:lnTo>
+                    <a:pt x="4225729" y="1633605"/>
+                  </a:lnTo>
+                  <a:lnTo>
+                    <a:pt x="4297351" y="1647323"/>
+                  </a:lnTo>
+                  <a:lnTo>
+                    <a:pt x="4368974" y="1660753"/>
+                  </a:lnTo>
+                  <a:lnTo>
+                    <a:pt x="4440596" y="1673900"/>
+                  </a:lnTo>
+                  <a:lnTo>
+                    <a:pt x="4512219" y="1686771"/>
+                  </a:lnTo>
+                  <a:lnTo>
+                    <a:pt x="4583841" y="1699371"/>
+                  </a:lnTo>
+                  <a:lnTo>
+                    <a:pt x="4655464" y="1711706"/>
+                  </a:lnTo>
+                  <a:lnTo>
+                    <a:pt x="4727086" y="1723781"/>
+                  </a:lnTo>
+                  <a:lnTo>
+                    <a:pt x="4798709" y="1735603"/>
+                  </a:lnTo>
+                  <a:lnTo>
+                    <a:pt x="4870331" y="1747176"/>
+                  </a:lnTo>
+                  <a:lnTo>
+                    <a:pt x="4941954" y="1758506"/>
+                  </a:lnTo>
+                  <a:lnTo>
+                    <a:pt x="5013576" y="1769597"/>
+                  </a:lnTo>
+                  <a:lnTo>
+                    <a:pt x="5085199" y="1780455"/>
+                  </a:lnTo>
+                  <a:lnTo>
+                    <a:pt x="5156821" y="1791085"/>
+                  </a:lnTo>
+                  <a:lnTo>
+                    <a:pt x="5228444" y="1801491"/>
+                  </a:lnTo>
+                  <a:lnTo>
+                    <a:pt x="5300066" y="1811679"/>
+                  </a:lnTo>
+                  <a:lnTo>
+                    <a:pt x="5371689" y="1821652"/>
+                  </a:lnTo>
+                  <a:lnTo>
+                    <a:pt x="5443311" y="1831415"/>
+                  </a:lnTo>
+                  <a:lnTo>
+                    <a:pt x="5514934" y="1840973"/>
+                  </a:lnTo>
+                  <a:lnTo>
+                    <a:pt x="5586557" y="1850331"/>
+                  </a:lnTo>
+                  <a:lnTo>
+                    <a:pt x="5658179" y="1859491"/>
+                  </a:lnTo>
+                  <a:lnTo>
+                    <a:pt x="5729802" y="1868459"/>
+                  </a:lnTo>
+                  <a:lnTo>
+                    <a:pt x="5801424" y="1877238"/>
+                  </a:lnTo>
+                  <a:lnTo>
+                    <a:pt x="5873047" y="1885832"/>
+                  </a:lnTo>
+                  <a:lnTo>
+                    <a:pt x="5944669" y="1894246"/>
+                  </a:lnTo>
+                  <a:lnTo>
+                    <a:pt x="6016292" y="1902483"/>
+                  </a:lnTo>
+                  <a:lnTo>
+                    <a:pt x="6087914" y="1910546"/>
+                  </a:lnTo>
+                  <a:lnTo>
+                    <a:pt x="6159537" y="1918440"/>
+                  </a:lnTo>
+                  <a:lnTo>
+                    <a:pt x="6231159" y="1926168"/>
+                  </a:lnTo>
+                  <a:lnTo>
+                    <a:pt x="6302782" y="1933734"/>
+                  </a:lnTo>
+                  <a:lnTo>
+                    <a:pt x="6374404" y="1941140"/>
+                  </a:lnTo>
+                  <a:lnTo>
+                    <a:pt x="6446027" y="1948391"/>
+                  </a:lnTo>
+                  <a:lnTo>
+                    <a:pt x="6517649" y="1955489"/>
+                  </a:lnTo>
+                  <a:lnTo>
+                    <a:pt x="6589272" y="1962438"/>
+                  </a:lnTo>
+                  <a:lnTo>
+                    <a:pt x="6660894" y="1969240"/>
+                  </a:lnTo>
+                  <a:lnTo>
+                    <a:pt x="6732517" y="1975900"/>
+                  </a:lnTo>
+                  <a:lnTo>
+                    <a:pt x="6804139" y="1982420"/>
+                  </a:lnTo>
+                  <a:lnTo>
+                    <a:pt x="6875762" y="1988802"/>
+                  </a:lnTo>
+                  <a:lnTo>
+                    <a:pt x="6947385" y="1995050"/>
+                  </a:lnTo>
+                  <a:lnTo>
+                    <a:pt x="7019007" y="2001167"/>
+                  </a:lnTo>
+                  <a:lnTo>
+                    <a:pt x="7090630" y="2007156"/>
                   </a:lnTo>
                 </a:path>
               </a:pathLst>
@@ -5153,7 +5153,7 @@
                   <a:latin typeface="Helvetica"/>
                   <a:cs typeface="Helvetica"/>
                 </a:rPr>
-                <a:t>subHR per 10 % decline: 1.29 (1.21-1.38), p_Bonf = &lt;0.001 (n = 6)  |  per IQR decline (Δ = 29.3 %): 2.12 (1.75-2.57)  |  IQR: [-14.6, 14.7] %</a:t>
+                <a:t>subHR per 10 % decline: 1.29 (1.21-1.38), p_Bonf = &lt;0.001 (n = 6)  |  per IQR decline (Δ = 29.3 %): 2.11 (1.74-2.56)  |  IQR: [-14.6, 14.7] %</a:t>
               </a:r>
             </a:p>
           </p:txBody>
